--- a/presentations/business_capstone.pptx
+++ b/presentations/business_capstone.pptx
@@ -5129,7 +5129,7 @@
               </a:defRPr>
             </a:pPr>
             <a:r>
-              <a:t>•  Thresholds and priority mapping are carried forward as project settings, not owner-approved policy.</a:t>
+              <a:t>•  Thresholds and priority mapping are project settings, not owner-approved policy.</a:t>
             </a:r>
           </a:p>
           <a:p>
@@ -6111,7 +6111,7 @@
               </a:defRPr>
             </a:pPr>
             <a:r>
-              <a:t>•  Whether the inherited priority targets and time clock match approved SLA policy.</a:t>
+              <a:t>•  Whether the configured priority targets and time clock match approved SLA policy.</a:t>
             </a:r>
           </a:p>
           <a:p>

--- a/presentations/business_capstone.pptx
+++ b/presentations/business_capstone.pptx
@@ -5,18 +5,18 @@
     <p:sldMasterId id="2147483648" r:id="rId1"/>
   </p:sldMasterIdLst>
   <p:sldIdLst>
-    <p:sldId id="256" r:id="rId7"/>
-    <p:sldId id="257" r:id="rId8"/>
-    <p:sldId id="258" r:id="rId9"/>
-    <p:sldId id="259" r:id="rId10"/>
-    <p:sldId id="260" r:id="rId11"/>
-    <p:sldId id="261" r:id="rId12"/>
-    <p:sldId id="262" r:id="rId13"/>
-    <p:sldId id="263" r:id="rId14"/>
-    <p:sldId id="264" r:id="rId15"/>
-    <p:sldId id="265" r:id="rId16"/>
+    <p:sldId id="256" r:id="rId2"/>
+    <p:sldId id="257" r:id="rId3"/>
+    <p:sldId id="258" r:id="rId4"/>
+    <p:sldId id="259" r:id="rId5"/>
+    <p:sldId id="260" r:id="rId6"/>
+    <p:sldId id="261" r:id="rId7"/>
+    <p:sldId id="262" r:id="rId8"/>
+    <p:sldId id="263" r:id="rId9"/>
+    <p:sldId id="264" r:id="rId10"/>
+    <p:sldId id="265" r:id="rId11"/>
   </p:sldIdLst>
-  <p:sldSz cx="12191695" cy="6858000" type="screen4x3"/>
+  <p:sldSz cx="12192000" cy="6858000"/>
   <p:notesSz cx="6858000" cy="9144000"/>
   <p:defaultTextStyle>
     <a:defPPr>
@@ -113,6 +113,22 @@
       </a:defRPr>
     </a:lvl9pPr>
   </p:defaultTextStyle>
+  <p:extLst>
+    <p:ext uri="{EFAFB233-063F-42B5-8137-9DF3F51BA10A}">
+      <p15:sldGuideLst xmlns:p15="http://schemas.microsoft.com/office/powerpoint/2012/main">
+        <p15:guide id="1" orient="horz" pos="2160">
+          <p15:clr>
+            <a:srgbClr val="A4A3A4"/>
+          </p15:clr>
+        </p15:guide>
+        <p15:guide id="2" pos="2880">
+          <p15:clr>
+            <a:srgbClr val="A4A3A4"/>
+          </p15:clr>
+        </p15:guide>
+      </p15:sldGuideLst>
+    </p:ext>
+  </p:extLst>
 </p:presentation>
 </file>
 
@@ -154,10 +170,9 @@
           <a:lstStyle/>
           <a:p>
             <a:r>
-              <a:rPr lang="en-US" smtClean="0"/>
+              <a:rPr lang="en-US"/>
               <a:t>Click to edit Master title style</a:t>
             </a:r>
-            <a:endParaRPr lang="en-US"/>
           </a:p>
         </p:txBody>
       </p:sp>
@@ -273,10 +288,9 @@
           </a:lstStyle>
           <a:p>
             <a:r>
-              <a:rPr lang="en-US" smtClean="0"/>
+              <a:rPr lang="en-US"/>
               <a:t>Click to edit Master subtitle style</a:t>
             </a:r>
-            <a:endParaRPr lang="en-US"/>
           </a:p>
         </p:txBody>
       </p:sp>
@@ -297,7 +311,7 @@
           <a:p>
             <a:fld id="{5BCAD085-E8A6-8845-BD4E-CB4CCA059FC4}" type="datetimeFigureOut">
               <a:rPr lang="en-US" smtClean="0"/>
-              <a:t>1/27/13</a:t>
+              <a:t>10/2/2026</a:t>
             </a:fld>
             <a:endParaRPr lang="en-US"/>
           </a:p>
@@ -391,10 +405,9 @@
           <a:lstStyle/>
           <a:p>
             <a:r>
-              <a:rPr lang="en-US" smtClean="0"/>
+              <a:rPr lang="en-US"/>
               <a:t>Click to edit Master title style</a:t>
             </a:r>
-            <a:endParaRPr lang="en-US"/>
           </a:p>
         </p:txBody>
       </p:sp>
@@ -415,38 +428,37 @@
           <a:p>
             <a:pPr lvl="0"/>
             <a:r>
-              <a:rPr lang="en-US" smtClean="0"/>
+              <a:rPr lang="en-US"/>
               <a:t>Click to edit Master text styles</a:t>
             </a:r>
           </a:p>
           <a:p>
             <a:pPr lvl="1"/>
             <a:r>
-              <a:rPr lang="en-US" smtClean="0"/>
+              <a:rPr lang="en-US"/>
               <a:t>Second level</a:t>
             </a:r>
           </a:p>
           <a:p>
             <a:pPr lvl="2"/>
             <a:r>
-              <a:rPr lang="en-US" smtClean="0"/>
+              <a:rPr lang="en-US"/>
               <a:t>Third level</a:t>
             </a:r>
           </a:p>
           <a:p>
             <a:pPr lvl="3"/>
             <a:r>
-              <a:rPr lang="en-US" smtClean="0"/>
+              <a:rPr lang="en-US"/>
               <a:t>Fourth level</a:t>
             </a:r>
           </a:p>
           <a:p>
             <a:pPr lvl="4"/>
             <a:r>
-              <a:rPr lang="en-US" smtClean="0"/>
+              <a:rPr lang="en-US"/>
               <a:t>Fifth level</a:t>
             </a:r>
-            <a:endParaRPr lang="en-US"/>
           </a:p>
         </p:txBody>
       </p:sp>
@@ -467,7 +479,7 @@
           <a:p>
             <a:fld id="{5BCAD085-E8A6-8845-BD4E-CB4CCA059FC4}" type="datetimeFigureOut">
               <a:rPr lang="en-US" smtClean="0"/>
-              <a:t>1/27/13</a:t>
+              <a:t>10/2/2026</a:t>
             </a:fld>
             <a:endParaRPr lang="en-US"/>
           </a:p>
@@ -566,10 +578,9 @@
           <a:lstStyle/>
           <a:p>
             <a:r>
-              <a:rPr lang="en-US" smtClean="0"/>
+              <a:rPr lang="en-US"/>
               <a:t>Click to edit Master title style</a:t>
             </a:r>
-            <a:endParaRPr lang="en-US"/>
           </a:p>
         </p:txBody>
       </p:sp>
@@ -595,38 +606,37 @@
           <a:p>
             <a:pPr lvl="0"/>
             <a:r>
-              <a:rPr lang="en-US" smtClean="0"/>
+              <a:rPr lang="en-US"/>
               <a:t>Click to edit Master text styles</a:t>
             </a:r>
           </a:p>
           <a:p>
             <a:pPr lvl="1"/>
             <a:r>
-              <a:rPr lang="en-US" smtClean="0"/>
+              <a:rPr lang="en-US"/>
               <a:t>Second level</a:t>
             </a:r>
           </a:p>
           <a:p>
             <a:pPr lvl="2"/>
             <a:r>
-              <a:rPr lang="en-US" smtClean="0"/>
+              <a:rPr lang="en-US"/>
               <a:t>Third level</a:t>
             </a:r>
           </a:p>
           <a:p>
             <a:pPr lvl="3"/>
             <a:r>
-              <a:rPr lang="en-US" smtClean="0"/>
+              <a:rPr lang="en-US"/>
               <a:t>Fourth level</a:t>
             </a:r>
           </a:p>
           <a:p>
             <a:pPr lvl="4"/>
             <a:r>
-              <a:rPr lang="en-US" smtClean="0"/>
+              <a:rPr lang="en-US"/>
               <a:t>Fifth level</a:t>
             </a:r>
-            <a:endParaRPr lang="en-US"/>
           </a:p>
         </p:txBody>
       </p:sp>
@@ -647,7 +657,7 @@
           <a:p>
             <a:fld id="{5BCAD085-E8A6-8845-BD4E-CB4CCA059FC4}" type="datetimeFigureOut">
               <a:rPr lang="en-US" smtClean="0"/>
-              <a:t>1/27/13</a:t>
+              <a:t>10/2/2026</a:t>
             </a:fld>
             <a:endParaRPr lang="en-US"/>
           </a:p>
@@ -741,10 +751,9 @@
           <a:lstStyle/>
           <a:p>
             <a:r>
-              <a:rPr lang="en-US" smtClean="0"/>
+              <a:rPr lang="en-US"/>
               <a:t>Click to edit Master title style</a:t>
             </a:r>
-            <a:endParaRPr lang="en-US"/>
           </a:p>
         </p:txBody>
       </p:sp>
@@ -765,38 +774,37 @@
           <a:p>
             <a:pPr lvl="0"/>
             <a:r>
-              <a:rPr lang="en-US" smtClean="0"/>
+              <a:rPr lang="en-US"/>
               <a:t>Click to edit Master text styles</a:t>
             </a:r>
           </a:p>
           <a:p>
             <a:pPr lvl="1"/>
             <a:r>
-              <a:rPr lang="en-US" smtClean="0"/>
+              <a:rPr lang="en-US"/>
               <a:t>Second level</a:t>
             </a:r>
           </a:p>
           <a:p>
             <a:pPr lvl="2"/>
             <a:r>
-              <a:rPr lang="en-US" smtClean="0"/>
+              <a:rPr lang="en-US"/>
               <a:t>Third level</a:t>
             </a:r>
           </a:p>
           <a:p>
             <a:pPr lvl="3"/>
             <a:r>
-              <a:rPr lang="en-US" smtClean="0"/>
+              <a:rPr lang="en-US"/>
               <a:t>Fourth level</a:t>
             </a:r>
           </a:p>
           <a:p>
             <a:pPr lvl="4"/>
             <a:r>
-              <a:rPr lang="en-US" smtClean="0"/>
+              <a:rPr lang="en-US"/>
               <a:t>Fifth level</a:t>
             </a:r>
-            <a:endParaRPr lang="en-US"/>
           </a:p>
         </p:txBody>
       </p:sp>
@@ -817,7 +825,7 @@
           <a:p>
             <a:fld id="{5BCAD085-E8A6-8845-BD4E-CB4CCA059FC4}" type="datetimeFigureOut">
               <a:rPr lang="en-US" smtClean="0"/>
-              <a:t>1/27/13</a:t>
+              <a:t>10/2/2026</a:t>
             </a:fld>
             <a:endParaRPr lang="en-US"/>
           </a:p>
@@ -920,10 +928,9 @@
           </a:lstStyle>
           <a:p>
             <a:r>
-              <a:rPr lang="en-US" smtClean="0"/>
+              <a:rPr lang="en-US"/>
               <a:t>Click to edit Master title style</a:t>
             </a:r>
-            <a:endParaRPr lang="en-US"/>
           </a:p>
         </p:txBody>
       </p:sp>
@@ -1040,7 +1047,7 @@
           <a:p>
             <a:pPr lvl="0"/>
             <a:r>
-              <a:rPr lang="en-US" smtClean="0"/>
+              <a:rPr lang="en-US"/>
               <a:t>Click to edit Master text styles</a:t>
             </a:r>
           </a:p>
@@ -1063,7 +1070,7 @@
           <a:p>
             <a:fld id="{5BCAD085-E8A6-8845-BD4E-CB4CCA059FC4}" type="datetimeFigureOut">
               <a:rPr lang="en-US" smtClean="0"/>
-              <a:t>1/27/13</a:t>
+              <a:t>10/2/2026</a:t>
             </a:fld>
             <a:endParaRPr lang="en-US"/>
           </a:p>
@@ -1157,10 +1164,9 @@
           <a:lstStyle/>
           <a:p>
             <a:r>
-              <a:rPr lang="en-US" smtClean="0"/>
+              <a:rPr lang="en-US"/>
               <a:t>Click to edit Master title style</a:t>
             </a:r>
-            <a:endParaRPr lang="en-US"/>
           </a:p>
         </p:txBody>
       </p:sp>
@@ -1214,38 +1220,37 @@
           <a:p>
             <a:pPr lvl="0"/>
             <a:r>
-              <a:rPr lang="en-US" smtClean="0"/>
+              <a:rPr lang="en-US"/>
               <a:t>Click to edit Master text styles</a:t>
             </a:r>
           </a:p>
           <a:p>
             <a:pPr lvl="1"/>
             <a:r>
-              <a:rPr lang="en-US" smtClean="0"/>
+              <a:rPr lang="en-US"/>
               <a:t>Second level</a:t>
             </a:r>
           </a:p>
           <a:p>
             <a:pPr lvl="2"/>
             <a:r>
-              <a:rPr lang="en-US" smtClean="0"/>
+              <a:rPr lang="en-US"/>
               <a:t>Third level</a:t>
             </a:r>
           </a:p>
           <a:p>
             <a:pPr lvl="3"/>
             <a:r>
-              <a:rPr lang="en-US" smtClean="0"/>
+              <a:rPr lang="en-US"/>
               <a:t>Fourth level</a:t>
             </a:r>
           </a:p>
           <a:p>
             <a:pPr lvl="4"/>
             <a:r>
-              <a:rPr lang="en-US" smtClean="0"/>
+              <a:rPr lang="en-US"/>
               <a:t>Fifth level</a:t>
             </a:r>
-            <a:endParaRPr lang="en-US"/>
           </a:p>
         </p:txBody>
       </p:sp>
@@ -1299,38 +1304,37 @@
           <a:p>
             <a:pPr lvl="0"/>
             <a:r>
-              <a:rPr lang="en-US" smtClean="0"/>
+              <a:rPr lang="en-US"/>
               <a:t>Click to edit Master text styles</a:t>
             </a:r>
           </a:p>
           <a:p>
             <a:pPr lvl="1"/>
             <a:r>
-              <a:rPr lang="en-US" smtClean="0"/>
+              <a:rPr lang="en-US"/>
               <a:t>Second level</a:t>
             </a:r>
           </a:p>
           <a:p>
             <a:pPr lvl="2"/>
             <a:r>
-              <a:rPr lang="en-US" smtClean="0"/>
+              <a:rPr lang="en-US"/>
               <a:t>Third level</a:t>
             </a:r>
           </a:p>
           <a:p>
             <a:pPr lvl="3"/>
             <a:r>
-              <a:rPr lang="en-US" smtClean="0"/>
+              <a:rPr lang="en-US"/>
               <a:t>Fourth level</a:t>
             </a:r>
           </a:p>
           <a:p>
             <a:pPr lvl="4"/>
             <a:r>
-              <a:rPr lang="en-US" smtClean="0"/>
+              <a:rPr lang="en-US"/>
               <a:t>Fifth level</a:t>
             </a:r>
-            <a:endParaRPr lang="en-US"/>
           </a:p>
         </p:txBody>
       </p:sp>
@@ -1351,7 +1355,7 @@
           <a:p>
             <a:fld id="{5BCAD085-E8A6-8845-BD4E-CB4CCA059FC4}" type="datetimeFigureOut">
               <a:rPr lang="en-US" smtClean="0"/>
-              <a:t>1/27/13</a:t>
+              <a:t>10/2/2026</a:t>
             </a:fld>
             <a:endParaRPr lang="en-US"/>
           </a:p>
@@ -1449,10 +1453,9 @@
           </a:lstStyle>
           <a:p>
             <a:r>
-              <a:rPr lang="en-US" smtClean="0"/>
+              <a:rPr lang="en-US"/>
               <a:t>Click to edit Master title style</a:t>
             </a:r>
-            <a:endParaRPr lang="en-US"/>
           </a:p>
         </p:txBody>
       </p:sp>
@@ -1515,7 +1518,7 @@
           <a:p>
             <a:pPr lvl="0"/>
             <a:r>
-              <a:rPr lang="en-US" smtClean="0"/>
+              <a:rPr lang="en-US"/>
               <a:t>Click to edit Master text styles</a:t>
             </a:r>
           </a:p>
@@ -1571,38 +1574,37 @@
           <a:p>
             <a:pPr lvl="0"/>
             <a:r>
-              <a:rPr lang="en-US" smtClean="0"/>
+              <a:rPr lang="en-US"/>
               <a:t>Click to edit Master text styles</a:t>
             </a:r>
           </a:p>
           <a:p>
             <a:pPr lvl="1"/>
             <a:r>
-              <a:rPr lang="en-US" smtClean="0"/>
+              <a:rPr lang="en-US"/>
               <a:t>Second level</a:t>
             </a:r>
           </a:p>
           <a:p>
             <a:pPr lvl="2"/>
             <a:r>
-              <a:rPr lang="en-US" smtClean="0"/>
+              <a:rPr lang="en-US"/>
               <a:t>Third level</a:t>
             </a:r>
           </a:p>
           <a:p>
             <a:pPr lvl="3"/>
             <a:r>
-              <a:rPr lang="en-US" smtClean="0"/>
+              <a:rPr lang="en-US"/>
               <a:t>Fourth level</a:t>
             </a:r>
           </a:p>
           <a:p>
             <a:pPr lvl="4"/>
             <a:r>
-              <a:rPr lang="en-US" smtClean="0"/>
+              <a:rPr lang="en-US"/>
               <a:t>Fifth level</a:t>
             </a:r>
-            <a:endParaRPr lang="en-US"/>
           </a:p>
         </p:txBody>
       </p:sp>
@@ -1665,7 +1667,7 @@
           <a:p>
             <a:pPr lvl="0"/>
             <a:r>
-              <a:rPr lang="en-US" smtClean="0"/>
+              <a:rPr lang="en-US"/>
               <a:t>Click to edit Master text styles</a:t>
             </a:r>
           </a:p>
@@ -1721,38 +1723,37 @@
           <a:p>
             <a:pPr lvl="0"/>
             <a:r>
-              <a:rPr lang="en-US" smtClean="0"/>
+              <a:rPr lang="en-US"/>
               <a:t>Click to edit Master text styles</a:t>
             </a:r>
           </a:p>
           <a:p>
             <a:pPr lvl="1"/>
             <a:r>
-              <a:rPr lang="en-US" smtClean="0"/>
+              <a:rPr lang="en-US"/>
               <a:t>Second level</a:t>
             </a:r>
           </a:p>
           <a:p>
             <a:pPr lvl="2"/>
             <a:r>
-              <a:rPr lang="en-US" smtClean="0"/>
+              <a:rPr lang="en-US"/>
               <a:t>Third level</a:t>
             </a:r>
           </a:p>
           <a:p>
             <a:pPr lvl="3"/>
             <a:r>
-              <a:rPr lang="en-US" smtClean="0"/>
+              <a:rPr lang="en-US"/>
               <a:t>Fourth level</a:t>
             </a:r>
           </a:p>
           <a:p>
             <a:pPr lvl="4"/>
             <a:r>
-              <a:rPr lang="en-US" smtClean="0"/>
+              <a:rPr lang="en-US"/>
               <a:t>Fifth level</a:t>
             </a:r>
-            <a:endParaRPr lang="en-US"/>
           </a:p>
         </p:txBody>
       </p:sp>
@@ -1773,7 +1774,7 @@
           <a:p>
             <a:fld id="{5BCAD085-E8A6-8845-BD4E-CB4CCA059FC4}" type="datetimeFigureOut">
               <a:rPr lang="en-US" smtClean="0"/>
-              <a:t>1/27/13</a:t>
+              <a:t>10/2/2026</a:t>
             </a:fld>
             <a:endParaRPr lang="en-US"/>
           </a:p>
@@ -1867,10 +1868,9 @@
           <a:lstStyle/>
           <a:p>
             <a:r>
-              <a:rPr lang="en-US" smtClean="0"/>
+              <a:rPr lang="en-US"/>
               <a:t>Click to edit Master title style</a:t>
             </a:r>
-            <a:endParaRPr lang="en-US"/>
           </a:p>
         </p:txBody>
       </p:sp>
@@ -1891,7 +1891,7 @@
           <a:p>
             <a:fld id="{5BCAD085-E8A6-8845-BD4E-CB4CCA059FC4}" type="datetimeFigureOut">
               <a:rPr lang="en-US" smtClean="0"/>
-              <a:t>1/27/13</a:t>
+              <a:t>10/2/2026</a:t>
             </a:fld>
             <a:endParaRPr lang="en-US"/>
           </a:p>
@@ -1986,7 +1986,7 @@
           <a:p>
             <a:fld id="{5BCAD085-E8A6-8845-BD4E-CB4CCA059FC4}" type="datetimeFigureOut">
               <a:rPr lang="en-US" smtClean="0"/>
-              <a:t>1/27/13</a:t>
+              <a:t>10/2/2026</a:t>
             </a:fld>
             <a:endParaRPr lang="en-US"/>
           </a:p>
@@ -2089,10 +2089,9 @@
           </a:lstStyle>
           <a:p>
             <a:r>
-              <a:rPr lang="en-US" smtClean="0"/>
+              <a:rPr lang="en-US"/>
               <a:t>Click to edit Master title style</a:t>
             </a:r>
-            <a:endParaRPr lang="en-US"/>
           </a:p>
         </p:txBody>
       </p:sp>
@@ -2146,38 +2145,37 @@
           <a:p>
             <a:pPr lvl="0"/>
             <a:r>
-              <a:rPr lang="en-US" smtClean="0"/>
+              <a:rPr lang="en-US"/>
               <a:t>Click to edit Master text styles</a:t>
             </a:r>
           </a:p>
           <a:p>
             <a:pPr lvl="1"/>
             <a:r>
-              <a:rPr lang="en-US" smtClean="0"/>
+              <a:rPr lang="en-US"/>
               <a:t>Second level</a:t>
             </a:r>
           </a:p>
           <a:p>
             <a:pPr lvl="2"/>
             <a:r>
-              <a:rPr lang="en-US" smtClean="0"/>
+              <a:rPr lang="en-US"/>
               <a:t>Third level</a:t>
             </a:r>
           </a:p>
           <a:p>
             <a:pPr lvl="3"/>
             <a:r>
-              <a:rPr lang="en-US" smtClean="0"/>
+              <a:rPr lang="en-US"/>
               <a:t>Fourth level</a:t>
             </a:r>
           </a:p>
           <a:p>
             <a:pPr lvl="4"/>
             <a:r>
-              <a:rPr lang="en-US" smtClean="0"/>
+              <a:rPr lang="en-US"/>
               <a:t>Fifth level</a:t>
             </a:r>
-            <a:endParaRPr lang="en-US"/>
           </a:p>
         </p:txBody>
       </p:sp>
@@ -2240,7 +2238,7 @@
           <a:p>
             <a:pPr lvl="0"/>
             <a:r>
-              <a:rPr lang="en-US" smtClean="0"/>
+              <a:rPr lang="en-US"/>
               <a:t>Click to edit Master text styles</a:t>
             </a:r>
           </a:p>
@@ -2263,7 +2261,7 @@
           <a:p>
             <a:fld id="{5BCAD085-E8A6-8845-BD4E-CB4CCA059FC4}" type="datetimeFigureOut">
               <a:rPr lang="en-US" smtClean="0"/>
-              <a:t>1/27/13</a:t>
+              <a:t>10/2/2026</a:t>
             </a:fld>
             <a:endParaRPr lang="en-US"/>
           </a:p>
@@ -2366,10 +2364,9 @@
           </a:lstStyle>
           <a:p>
             <a:r>
-              <a:rPr lang="en-US" smtClean="0"/>
+              <a:rPr lang="en-US"/>
               <a:t>Click to edit Master title style</a:t>
             </a:r>
-            <a:endParaRPr lang="en-US"/>
           </a:p>
         </p:txBody>
       </p:sp>
@@ -2493,7 +2490,7 @@
           <a:p>
             <a:pPr lvl="0"/>
             <a:r>
-              <a:rPr lang="en-US" smtClean="0"/>
+              <a:rPr lang="en-US"/>
               <a:t>Click to edit Master text styles</a:t>
             </a:r>
           </a:p>
@@ -2516,7 +2513,7 @@
           <a:p>
             <a:fld id="{5BCAD085-E8A6-8845-BD4E-CB4CCA059FC4}" type="datetimeFigureOut">
               <a:rPr lang="en-US" smtClean="0"/>
-              <a:t>1/27/13</a:t>
+              <a:t>10/2/2026</a:t>
             </a:fld>
             <a:endParaRPr lang="en-US"/>
           </a:p>
@@ -2625,10 +2622,9 @@
           <a:lstStyle/>
           <a:p>
             <a:r>
-              <a:rPr lang="en-US" smtClean="0"/>
+              <a:rPr lang="en-US"/>
               <a:t>Click to edit Master title style</a:t>
             </a:r>
-            <a:endParaRPr lang="en-US"/>
           </a:p>
         </p:txBody>
       </p:sp>
@@ -2659,38 +2655,37 @@
           <a:p>
             <a:pPr lvl="0"/>
             <a:r>
-              <a:rPr lang="en-US" smtClean="0"/>
+              <a:rPr lang="en-US"/>
               <a:t>Click to edit Master text styles</a:t>
             </a:r>
           </a:p>
           <a:p>
             <a:pPr lvl="1"/>
             <a:r>
-              <a:rPr lang="en-US" smtClean="0"/>
+              <a:rPr lang="en-US"/>
               <a:t>Second level</a:t>
             </a:r>
           </a:p>
           <a:p>
             <a:pPr lvl="2"/>
             <a:r>
-              <a:rPr lang="en-US" smtClean="0"/>
+              <a:rPr lang="en-US"/>
               <a:t>Third level</a:t>
             </a:r>
           </a:p>
           <a:p>
             <a:pPr lvl="3"/>
             <a:r>
-              <a:rPr lang="en-US" smtClean="0"/>
+              <a:rPr lang="en-US"/>
               <a:t>Fourth level</a:t>
             </a:r>
           </a:p>
           <a:p>
             <a:pPr lvl="4"/>
             <a:r>
-              <a:rPr lang="en-US" smtClean="0"/>
+              <a:rPr lang="en-US"/>
               <a:t>Fifth level</a:t>
             </a:r>
-            <a:endParaRPr lang="en-US"/>
           </a:p>
         </p:txBody>
       </p:sp>
@@ -2729,7 +2724,7 @@
           <a:p>
             <a:fld id="{5BCAD085-E8A6-8845-BD4E-CB4CCA059FC4}" type="datetimeFigureOut">
               <a:rPr lang="en-US" smtClean="0"/>
-              <a:t>1/27/13</a:t>
+              <a:t>10/2/2026</a:t>
             </a:fld>
             <a:endParaRPr lang="en-US"/>
           </a:p>
@@ -3088,12 +3083,12 @@
 </file>
 
 <file path=ppt/slides/slide1.xml><?xml version="1.0" encoding="utf-8"?>
-<p:sld xmlns:a="http://schemas.openxmlformats.org/drawingml/2006/main" xmlns:p="http://schemas.openxmlformats.org/presentationml/2006/main" xmlns:r="http://schemas.openxmlformats.org/officeDocument/2006/relationships">
+<p:sld xmlns:a="http://schemas.openxmlformats.org/drawingml/2006/main" xmlns:r="http://schemas.openxmlformats.org/officeDocument/2006/relationships" xmlns:p="http://schemas.openxmlformats.org/presentationml/2006/main">
   <p:cSld>
     <p:bg>
       <p:bgPr>
         <a:solidFill>
-          <a:srgbClr val="1F3752"/>
+          <a:srgbClr val="5B1220"/>
         </a:solidFill>
         <a:effectLst/>
       </p:bgPr>
@@ -3104,7 +3099,14 @@
         <p:cNvGrpSpPr/>
         <p:nvPr/>
       </p:nvGrpSpPr>
-      <p:grpSpPr/>
+      <p:grpSpPr>
+        <a:xfrm>
+          <a:off x="0" y="0"/>
+          <a:ext cx="0" cy="0"/>
+          <a:chOff x="0" y="0"/>
+          <a:chExt cx="0" cy="0"/>
+        </a:xfrm>
+      </p:grpSpPr>
       <p:sp>
         <p:nvSpPr>
           <p:cNvPr id="2" name="TextBox 1"/>
@@ -3159,7 +3161,7 @@
             <a:avLst/>
           </a:prstGeom>
           <a:solidFill>
-            <a:srgbClr val="3470A8"/>
+            <a:srgbClr val="C8102E"/>
           </a:solidFill>
           <a:ln>
             <a:noFill/>
@@ -3184,6 +3186,7 @@
           <a:lstStyle/>
           <a:p>
             <a:pPr algn="ctr"/>
+            <a:endParaRPr/>
           </a:p>
         </p:txBody>
       </p:sp>
@@ -3218,7 +3221,7 @@
               </a:spcAft>
               <a:defRPr sz="2000">
                 <a:solidFill>
-                  <a:srgbClr val="D6E2ED"/>
+                  <a:srgbClr val="F2D7DA"/>
                 </a:solidFill>
                 <a:latin typeface="DejaVu Sans"/>
               </a:defRPr>
@@ -3237,12 +3240,13 @@
               </a:spcAft>
               <a:defRPr sz="2000">
                 <a:solidFill>
-                  <a:srgbClr val="D6E2ED"/>
+                  <a:srgbClr val="F2D7DA"/>
                 </a:solidFill>
                 <a:latin typeface="DejaVu Sans"/>
               </a:defRPr>
             </a:pPr>
             <a:r>
+              <a:rPr dirty="0"/>
               <a:t>Retrospective priority-reference insights and week/month daily-arrival forecasts</a:t>
             </a:r>
           </a:p>
@@ -3256,14 +3260,147 @@
               </a:spcAft>
               <a:defRPr sz="2000">
                 <a:solidFill>
-                  <a:srgbClr val="D6E2ED"/>
+                  <a:srgbClr val="F2D7DA"/>
                 </a:solidFill>
                 <a:latin typeface="DejaVu Sans"/>
               </a:defRPr>
             </a:pPr>
             <a:r>
+              <a:rPr dirty="0"/>
               <a:t>Historical evidence to inform a possible human-reviewed capacity pilot</a:t>
             </a:r>
+          </a:p>
+        </p:txBody>
+      </p:sp>
+      <p:sp>
+        <p:nvSpPr>
+          <p:cNvPr id="5" name="TextBox 4"/>
+          <p:cNvSpPr txBox="1"/>
+          <p:nvPr/>
+        </p:nvSpPr>
+        <p:spPr>
+          <a:xfrm>
+            <a:off x="868680" y="1600200"/>
+            <a:ext cx="10515600" cy="365760"/>
+          </a:xfrm>
+          <a:prstGeom prst="rect">
+            <a:avLst/>
+          </a:prstGeom>
+          <a:noFill/>
+        </p:spPr>
+        <p:txBody>
+          <a:bodyPr wrap="square">
+            <a:spAutoFit/>
+          </a:bodyPr>
+          <a:lstStyle/>
+          <a:p>
+            <a:pPr>
+              <a:defRPr sz="1400" b="1">
+                <a:solidFill>
+                  <a:srgbClr val="F2A7AE"/>
+                </a:solidFill>
+                <a:latin typeface="DejaVu Sans"/>
+              </a:defRPr>
+            </a:pPr>
+            <a:r>
+              <a:t>BUSINESS CAPSTONE  |  SERVICE ANALYTICS</a:t>
+            </a:r>
+          </a:p>
+        </p:txBody>
+      </p:sp>
+      <p:sp>
+        <p:nvSpPr>
+          <p:cNvPr id="6" name="TextBox 5"/>
+          <p:cNvSpPr txBox="1"/>
+          <p:nvPr/>
+        </p:nvSpPr>
+        <p:spPr>
+          <a:xfrm>
+            <a:off x="868680" y="6263640"/>
+            <a:ext cx="10515600" cy="320040"/>
+          </a:xfrm>
+          <a:prstGeom prst="rect">
+            <a:avLst/>
+          </a:prstGeom>
+          <a:noFill/>
+        </p:spPr>
+        <p:txBody>
+          <a:bodyPr wrap="square">
+            <a:spAutoFit/>
+          </a:bodyPr>
+          <a:lstStyle/>
+          <a:p>
+            <a:pPr>
+              <a:defRPr sz="1200">
+                <a:solidFill>
+                  <a:srgbClr val="D79AA2"/>
+                </a:solidFill>
+                <a:latin typeface="DejaVu Sans"/>
+              </a:defRPr>
+            </a:pPr>
+            <a:r>
+              <a:t>Historical analysis of 27,348 scoped tickets  |  2016-2023  |  10 slides</a:t>
+            </a:r>
+          </a:p>
+        </p:txBody>
+      </p:sp>
+      <p:sp>
+        <p:nvSpPr>
+          <p:cNvPr id="30" name="Rectangle 30"/>
+          <p:cNvSpPr/>
+          <p:nvPr/>
+        </p:nvSpPr>
+        <p:spPr>
+          <a:xfrm>
+            <a:off x="0" y="0"/>
+            <a:ext cx="12191695" cy="109728"/>
+          </a:xfrm>
+          <a:prstGeom prst="rect">
+            <a:avLst/>
+          </a:prstGeom>
+          <a:solidFill>
+            <a:srgbClr val="C8102E"/>
+          </a:solidFill>
+          <a:ln>
+            <a:noFill/>
+          </a:ln>
+        </p:spPr>
+        <p:txBody>
+          <a:bodyPr rtlCol="0" anchor="ctr"/>
+          <a:lstStyle/>
+          <a:p>
+            <a:pPr algn="ctr"/>
+            <a:endParaRPr/>
+          </a:p>
+        </p:txBody>
+      </p:sp>
+      <p:sp>
+        <p:nvSpPr>
+          <p:cNvPr id="31" name="Rectangle 31"/>
+          <p:cNvSpPr/>
+          <p:nvPr/>
+        </p:nvSpPr>
+        <p:spPr>
+          <a:xfrm>
+            <a:off x="0" y="6748272"/>
+            <a:ext cx="12191695" cy="109728"/>
+          </a:xfrm>
+          <a:prstGeom prst="rect">
+            <a:avLst/>
+          </a:prstGeom>
+          <a:solidFill>
+            <a:srgbClr val="C8102E"/>
+          </a:solidFill>
+          <a:ln>
+            <a:noFill/>
+          </a:ln>
+        </p:spPr>
+        <p:txBody>
+          <a:bodyPr rtlCol="0" anchor="ctr"/>
+          <a:lstStyle/>
+          <a:p>
+            <a:pPr algn="ctr"/>
+            <a:endParaRPr/>
           </a:p>
         </p:txBody>
       </p:sp>
@@ -3276,12 +3413,12 @@
 </file>
 
 <file path=ppt/slides/slide10.xml><?xml version="1.0" encoding="utf-8"?>
-<p:sld xmlns:a="http://schemas.openxmlformats.org/drawingml/2006/main" xmlns:p="http://schemas.openxmlformats.org/presentationml/2006/main" xmlns:r="http://schemas.openxmlformats.org/officeDocument/2006/relationships">
+<p:sld xmlns:a="http://schemas.openxmlformats.org/drawingml/2006/main" xmlns:r="http://schemas.openxmlformats.org/officeDocument/2006/relationships" xmlns:p="http://schemas.openxmlformats.org/presentationml/2006/main">
   <p:cSld>
     <p:bg>
       <p:bgPr>
         <a:solidFill>
-          <a:srgbClr val="F8FAFC"/>
+          <a:srgbClr val="FDF9F9"/>
         </a:solidFill>
         <a:effectLst/>
       </p:bgPr>
@@ -3292,7 +3429,14 @@
         <p:cNvGrpSpPr/>
         <p:nvPr/>
       </p:nvGrpSpPr>
-      <p:grpSpPr/>
+      <p:grpSpPr>
+        <a:xfrm>
+          <a:off x="0" y="0"/>
+          <a:ext cx="0" cy="0"/>
+          <a:chOff x="0" y="0"/>
+          <a:chExt cx="0" cy="0"/>
+        </a:xfrm>
+      </p:grpSpPr>
       <p:sp>
         <p:nvSpPr>
           <p:cNvPr id="2" name="Rectangle 1"/>
@@ -3308,7 +3452,7 @@
             <a:avLst/>
           </a:prstGeom>
           <a:solidFill>
-            <a:srgbClr val="3470A8"/>
+            <a:srgbClr val="C8102E"/>
           </a:solidFill>
           <a:ln>
             <a:noFill/>
@@ -3333,6 +3477,7 @@
           <a:lstStyle/>
           <a:p>
             <a:pPr algn="ctr"/>
+            <a:endParaRPr/>
           </a:p>
         </p:txBody>
       </p:sp>
@@ -3364,7 +3509,7 @@
               </a:lnSpc>
               <a:defRPr sz="2800" b="1">
                 <a:solidFill>
-                  <a:srgbClr val="1F3752"/>
+                  <a:srgbClr val="5B1220"/>
                 </a:solidFill>
                 <a:latin typeface="DejaVu Sans"/>
               </a:defRPr>
@@ -3390,7 +3535,7 @@
             <a:avLst/>
           </a:prstGeom>
           <a:solidFill>
-            <a:srgbClr val="3470A8"/>
+            <a:srgbClr val="C8102E"/>
           </a:solidFill>
           <a:ln>
             <a:noFill/>
@@ -3415,6 +3560,7 @@
           <a:lstStyle/>
           <a:p>
             <a:pPr algn="ctr"/>
+            <a:endParaRPr/>
           </a:p>
         </p:txBody>
       </p:sp>
@@ -3427,7 +3573,7 @@
         <p:spPr>
           <a:xfrm>
             <a:off x="822960" y="1536192"/>
-            <a:ext cx="10515600" cy="1405890"/>
+            <a:ext cx="10515600" cy="1973580"/>
           </a:xfrm>
           <a:prstGeom prst="rect">
             <a:avLst/>
@@ -3449,7 +3595,7 @@
               </a:spcAft>
               <a:defRPr sz="1800">
                 <a:solidFill>
-                  <a:srgbClr val="4B545D"/>
+                  <a:srgbClr val="4A4448"/>
                 </a:solidFill>
                 <a:latin typeface="DejaVu Sans"/>
               </a:defRPr>
@@ -3468,7 +3614,7 @@
               </a:spcAft>
               <a:defRPr sz="1800">
                 <a:solidFill>
-                  <a:srgbClr val="4B545D"/>
+                  <a:srgbClr val="4A4448"/>
                 </a:solidFill>
                 <a:latin typeface="DejaVu Sans"/>
               </a:defRPr>
@@ -3487,7 +3633,7 @@
               </a:spcAft>
               <a:defRPr sz="1800">
                 <a:solidFill>
-                  <a:srgbClr val="4B545D"/>
+                  <a:srgbClr val="4A4448"/>
                 </a:solidFill>
                 <a:latin typeface="DejaVu Sans"/>
               </a:defRPr>
@@ -3495,6 +3641,55 @@
             <a:r>
               <a:t>•  Proceed only after data, policy and current-period validation.</a:t>
             </a:r>
+          </a:p>
+          <a:p>
+            <a:pPr>
+              <a:lnSpc>
+                <a:spcPct val="125000"/>
+              </a:lnSpc>
+              <a:spcAft>
+                <a:spcPts val="0"/>
+              </a:spcAft>
+              <a:defRPr sz="1500" b="1">
+                <a:solidFill>
+                  <a:srgbClr val="C8102E"/>
+                </a:solidFill>
+                <a:latin typeface="DejaVu Sans"/>
+              </a:defRPr>
+            </a:pPr>
+            <a:r>
+              <a:t>Bottom line: treat this as a validated historical prototype and evidence base, not an automated staffing or SLA-enforcement system.</a:t>
+            </a:r>
+          </a:p>
+        </p:txBody>
+      </p:sp>
+      <p:sp>
+        <p:nvSpPr>
+          <p:cNvPr id="90" name="Rectangle Accent 90"/>
+          <p:cNvSpPr/>
+          <p:nvPr/>
+        </p:nvSpPr>
+        <p:spPr>
+          <a:xfrm>
+            <a:off x="621792" y="2987802"/>
+            <a:ext cx="50292" cy="476250"/>
+          </a:xfrm>
+          <a:prstGeom prst="rect">
+            <a:avLst/>
+          </a:prstGeom>
+          <a:solidFill>
+            <a:srgbClr val="C8102E"/>
+          </a:solidFill>
+          <a:ln>
+            <a:noFill/>
+          </a:ln>
+        </p:spPr>
+        <p:txBody>
+          <a:bodyPr rtlCol="0" anchor="ctr"/>
+          <a:lstStyle/>
+          <a:p>
+            <a:pPr algn="ctr"/>
+            <a:endParaRPr/>
           </a:p>
         </p:txBody>
       </p:sp>
@@ -3523,7 +3718,7 @@
             <a:pPr>
               <a:defRPr sz="1000">
                 <a:solidFill>
-                  <a:srgbClr val="4B545D"/>
+                  <a:srgbClr val="4A4448"/>
                 </a:solidFill>
               </a:defRPr>
             </a:pPr>
@@ -3558,7 +3753,7 @@
             <a:pPr>
               <a:defRPr sz="1000" b="0">
                 <a:solidFill>
-                  <a:srgbClr val="4B545D"/>
+                  <a:srgbClr val="4A4448"/>
                 </a:solidFill>
                 <a:latin typeface="DejaVu Sans"/>
               </a:defRPr>
@@ -3578,12 +3773,12 @@
 </file>
 
 <file path=ppt/slides/slide2.xml><?xml version="1.0" encoding="utf-8"?>
-<p:sld xmlns:a="http://schemas.openxmlformats.org/drawingml/2006/main" xmlns:p="http://schemas.openxmlformats.org/presentationml/2006/main" xmlns:r="http://schemas.openxmlformats.org/officeDocument/2006/relationships">
+<p:sld xmlns:a="http://schemas.openxmlformats.org/drawingml/2006/main" xmlns:r="http://schemas.openxmlformats.org/officeDocument/2006/relationships" xmlns:p="http://schemas.openxmlformats.org/presentationml/2006/main">
   <p:cSld>
     <p:bg>
       <p:bgPr>
         <a:solidFill>
-          <a:srgbClr val="F8FAFC"/>
+          <a:srgbClr val="FDF9F9"/>
         </a:solidFill>
         <a:effectLst/>
       </p:bgPr>
@@ -3594,7 +3789,14 @@
         <p:cNvGrpSpPr/>
         <p:nvPr/>
       </p:nvGrpSpPr>
-      <p:grpSpPr/>
+      <p:grpSpPr>
+        <a:xfrm>
+          <a:off x="0" y="0"/>
+          <a:ext cx="0" cy="0"/>
+          <a:chOff x="0" y="0"/>
+          <a:chExt cx="0" cy="0"/>
+        </a:xfrm>
+      </p:grpSpPr>
       <p:sp>
         <p:nvSpPr>
           <p:cNvPr id="2" name="Rectangle 1"/>
@@ -3610,7 +3812,7 @@
             <a:avLst/>
           </a:prstGeom>
           <a:solidFill>
-            <a:srgbClr val="3470A8"/>
+            <a:srgbClr val="C8102E"/>
           </a:solidFill>
           <a:ln>
             <a:noFill/>
@@ -3635,6 +3837,7 @@
           <a:lstStyle/>
           <a:p>
             <a:pPr algn="ctr"/>
+            <a:endParaRPr/>
           </a:p>
         </p:txBody>
       </p:sp>
@@ -3666,7 +3869,7 @@
               </a:lnSpc>
               <a:defRPr sz="2800" b="1">
                 <a:solidFill>
-                  <a:srgbClr val="1F3752"/>
+                  <a:srgbClr val="5B1220"/>
                 </a:solidFill>
                 <a:latin typeface="DejaVu Sans"/>
               </a:defRPr>
@@ -3692,7 +3895,7 @@
             <a:avLst/>
           </a:prstGeom>
           <a:solidFill>
-            <a:srgbClr val="3470A8"/>
+            <a:srgbClr val="C8102E"/>
           </a:solidFill>
           <a:ln>
             <a:noFill/>
@@ -3717,6 +3920,7 @@
           <a:lstStyle/>
           <a:p>
             <a:pPr algn="ctr"/>
+            <a:endParaRPr/>
           </a:p>
         </p:txBody>
       </p:sp>
@@ -3729,7 +3933,7 @@
         <p:spPr>
           <a:xfrm>
             <a:off x="822960" y="1536192"/>
-            <a:ext cx="10515600" cy="1405890"/>
+            <a:ext cx="10515600" cy="1973580"/>
           </a:xfrm>
           <a:prstGeom prst="rect">
             <a:avLst/>
@@ -3751,12 +3955,13 @@
               </a:spcAft>
               <a:defRPr sz="1800">
                 <a:solidFill>
-                  <a:srgbClr val="4B545D"/>
+                  <a:srgbClr val="4A4448"/>
                 </a:solidFill>
                 <a:latin typeface="DejaVu Sans"/>
               </a:defRPr>
             </a:pPr>
             <a:r>
+              <a:rPr dirty="0"/>
               <a:t>•  How often did completed Ticket records meet the configured priority references?</a:t>
             </a:r>
           </a:p>
@@ -3770,12 +3975,13 @@
               </a:spcAft>
               <a:defRPr sz="1800">
                 <a:solidFill>
-                  <a:srgbClr val="4B545D"/>
+                  <a:srgbClr val="4A4448"/>
                 </a:solidFill>
                 <a:latin typeface="DejaVu Sans"/>
               </a:defRPr>
             </a:pPr>
             <a:r>
+              <a:rPr dirty="0"/>
               <a:t>•  Can the past daily arrival pattern support a useful next-week estimate?</a:t>
             </a:r>
           </a:p>
@@ -3789,14 +3995,65 @@
               </a:spcAft>
               <a:defRPr sz="1800">
                 <a:solidFill>
-                  <a:srgbClr val="4B545D"/>
+                  <a:srgbClr val="4A4448"/>
                 </a:solidFill>
                 <a:latin typeface="DejaVu Sans"/>
               </a:defRPr>
             </a:pPr>
             <a:r>
+              <a:rPr dirty="0"/>
               <a:t>•  What evidence is still needed before planners use a forecast?</a:t>
             </a:r>
+          </a:p>
+          <a:p>
+            <a:pPr>
+              <a:lnSpc>
+                <a:spcPct val="125000"/>
+              </a:lnSpc>
+              <a:spcAft>
+                <a:spcPts val="0"/>
+              </a:spcAft>
+              <a:defRPr sz="1500" b="1">
+                <a:solidFill>
+                  <a:srgbClr val="C8102E"/>
+                </a:solidFill>
+                <a:latin typeface="DejaVu Sans"/>
+              </a:defRPr>
+            </a:pPr>
+            <a:r>
+              <a:rPr dirty="0"/>
+              <a:t>Bottom line: the three driving questions are answered with historical evidence only — not a live operational guarantee.</a:t>
+            </a:r>
+          </a:p>
+        </p:txBody>
+      </p:sp>
+      <p:sp>
+        <p:nvSpPr>
+          <p:cNvPr id="90" name="Rectangle Accent 90"/>
+          <p:cNvSpPr/>
+          <p:nvPr/>
+        </p:nvSpPr>
+        <p:spPr>
+          <a:xfrm>
+            <a:off x="621792" y="2987802"/>
+            <a:ext cx="50292" cy="476250"/>
+          </a:xfrm>
+          <a:prstGeom prst="rect">
+            <a:avLst/>
+          </a:prstGeom>
+          <a:solidFill>
+            <a:srgbClr val="C8102E"/>
+          </a:solidFill>
+          <a:ln>
+            <a:noFill/>
+          </a:ln>
+        </p:spPr>
+        <p:txBody>
+          <a:bodyPr rtlCol="0" anchor="ctr"/>
+          <a:lstStyle/>
+          <a:p>
+            <a:pPr algn="ctr"/>
+            <a:endParaRPr/>
           </a:p>
         </p:txBody>
       </p:sp>
@@ -3825,7 +4082,7 @@
             <a:pPr>
               <a:defRPr sz="1000">
                 <a:solidFill>
-                  <a:srgbClr val="4B545D"/>
+                  <a:srgbClr val="4A4448"/>
                 </a:solidFill>
               </a:defRPr>
             </a:pPr>
@@ -3860,7 +4117,7 @@
             <a:pPr>
               <a:defRPr sz="1000" b="0">
                 <a:solidFill>
-                  <a:srgbClr val="4B545D"/>
+                  <a:srgbClr val="4A4448"/>
                 </a:solidFill>
                 <a:latin typeface="DejaVu Sans"/>
               </a:defRPr>
@@ -3880,12 +4137,12 @@
 </file>
 
 <file path=ppt/slides/slide3.xml><?xml version="1.0" encoding="utf-8"?>
-<p:sld xmlns:a="http://schemas.openxmlformats.org/drawingml/2006/main" xmlns:p="http://schemas.openxmlformats.org/presentationml/2006/main" xmlns:r="http://schemas.openxmlformats.org/officeDocument/2006/relationships">
+<p:sld xmlns:a="http://schemas.openxmlformats.org/drawingml/2006/main" xmlns:r="http://schemas.openxmlformats.org/officeDocument/2006/relationships" xmlns:p="http://schemas.openxmlformats.org/presentationml/2006/main">
   <p:cSld>
     <p:bg>
       <p:bgPr>
         <a:solidFill>
-          <a:srgbClr val="F8FAFC"/>
+          <a:srgbClr val="FDF9F9"/>
         </a:solidFill>
         <a:effectLst/>
       </p:bgPr>
@@ -3896,7 +4153,14 @@
         <p:cNvGrpSpPr/>
         <p:nvPr/>
       </p:nvGrpSpPr>
-      <p:grpSpPr/>
+      <p:grpSpPr>
+        <a:xfrm>
+          <a:off x="0" y="0"/>
+          <a:ext cx="0" cy="0"/>
+          <a:chOff x="0" y="0"/>
+          <a:chExt cx="0" cy="0"/>
+        </a:xfrm>
+      </p:grpSpPr>
       <p:sp>
         <p:nvSpPr>
           <p:cNvPr id="2" name="Rectangle 1"/>
@@ -3912,7 +4176,7 @@
             <a:avLst/>
           </a:prstGeom>
           <a:solidFill>
-            <a:srgbClr val="3470A8"/>
+            <a:srgbClr val="C8102E"/>
           </a:solidFill>
           <a:ln>
             <a:noFill/>
@@ -3937,6 +4201,7 @@
           <a:lstStyle/>
           <a:p>
             <a:pPr algn="ctr"/>
+            <a:endParaRPr/>
           </a:p>
         </p:txBody>
       </p:sp>
@@ -3968,7 +4233,7 @@
               </a:lnSpc>
               <a:defRPr sz="2800" b="1">
                 <a:solidFill>
-                  <a:srgbClr val="1F3752"/>
+                  <a:srgbClr val="5B1220"/>
                 </a:solidFill>
                 <a:latin typeface="DejaVu Sans"/>
               </a:defRPr>
@@ -3994,7 +4259,7 @@
             <a:avLst/>
           </a:prstGeom>
           <a:solidFill>
-            <a:srgbClr val="3470A8"/>
+            <a:srgbClr val="C8102E"/>
           </a:solidFill>
           <a:ln>
             <a:noFill/>
@@ -4019,6 +4284,7 @@
           <a:lstStyle/>
           <a:p>
             <a:pPr algn="ctr"/>
+            <a:endParaRPr/>
           </a:p>
         </p:txBody>
       </p:sp>
@@ -4031,7 +4297,7 @@
         <p:spPr>
           <a:xfrm>
             <a:off x="822960" y="1536192"/>
-            <a:ext cx="10515600" cy="2853690"/>
+            <a:ext cx="10515600" cy="3421380"/>
           </a:xfrm>
           <a:prstGeom prst="rect">
             <a:avLst/>
@@ -4053,7 +4319,7 @@
               </a:spcAft>
               <a:defRPr sz="1800">
                 <a:solidFill>
-                  <a:srgbClr val="4B545D"/>
+                  <a:srgbClr val="4A4448"/>
                 </a:solidFill>
                 <a:latin typeface="DejaVu Sans"/>
               </a:defRPr>
@@ -4072,7 +4338,7 @@
               </a:spcAft>
               <a:defRPr sz="1800">
                 <a:solidFill>
-                  <a:srgbClr val="4B545D"/>
+                  <a:srgbClr val="4A4448"/>
                 </a:solidFill>
                 <a:latin typeface="DejaVu Sans"/>
               </a:defRPr>
@@ -4091,7 +4357,7 @@
               </a:spcAft>
               <a:defRPr sz="1800">
                 <a:solidFill>
-                  <a:srgbClr val="4B545D"/>
+                  <a:srgbClr val="4A4448"/>
                 </a:solidFill>
                 <a:latin typeface="DejaVu Sans"/>
               </a:defRPr>
@@ -4110,7 +4376,7 @@
               </a:spcAft>
               <a:defRPr sz="1800">
                 <a:solidFill>
-                  <a:srgbClr val="4B545D"/>
+                  <a:srgbClr val="4A4448"/>
                 </a:solidFill>
                 <a:latin typeface="DejaVu Sans"/>
               </a:defRPr>
@@ -4129,7 +4395,7 @@
               </a:spcAft>
               <a:defRPr sz="1800">
                 <a:solidFill>
-                  <a:srgbClr val="4B545D"/>
+                  <a:srgbClr val="4A4448"/>
                 </a:solidFill>
                 <a:latin typeface="DejaVu Sans"/>
               </a:defRPr>
@@ -4137,6 +4403,55 @@
             <a:r>
               <a:t>•  The source file and documentation disagree about pre-2016 creation dates; current demand is not represented.</a:t>
             </a:r>
+          </a:p>
+          <a:p>
+            <a:pPr>
+              <a:lnSpc>
+                <a:spcPct val="125000"/>
+              </a:lnSpc>
+              <a:spcAft>
+                <a:spcPts val="0"/>
+              </a:spcAft>
+              <a:defRPr sz="1500" b="1">
+                <a:solidFill>
+                  <a:srgbClr val="C8102E"/>
+                </a:solidFill>
+                <a:latin typeface="DejaVu Sans"/>
+              </a:defRPr>
+            </a:pPr>
+            <a:r>
+              <a:t>Bottom line: one verified, well-documented ticket history backs every number, but current coverage and licensing caveats remain open.</a:t>
+            </a:r>
+          </a:p>
+        </p:txBody>
+      </p:sp>
+      <p:sp>
+        <p:nvSpPr>
+          <p:cNvPr id="90" name="Rectangle Accent 90"/>
+          <p:cNvSpPr/>
+          <p:nvPr/>
+        </p:nvSpPr>
+        <p:spPr>
+          <a:xfrm>
+            <a:off x="621792" y="4435602"/>
+            <a:ext cx="50292" cy="476250"/>
+          </a:xfrm>
+          <a:prstGeom prst="rect">
+            <a:avLst/>
+          </a:prstGeom>
+          <a:solidFill>
+            <a:srgbClr val="C8102E"/>
+          </a:solidFill>
+          <a:ln>
+            <a:noFill/>
+          </a:ln>
+        </p:spPr>
+        <p:txBody>
+          <a:bodyPr rtlCol="0" anchor="ctr"/>
+          <a:lstStyle/>
+          <a:p>
+            <a:pPr algn="ctr"/>
+            <a:endParaRPr/>
           </a:p>
         </p:txBody>
       </p:sp>
@@ -4165,7 +4480,7 @@
             <a:pPr>
               <a:defRPr sz="1000">
                 <a:solidFill>
-                  <a:srgbClr val="4B545D"/>
+                  <a:srgbClr val="4A4448"/>
                 </a:solidFill>
               </a:defRPr>
             </a:pPr>
@@ -4200,7 +4515,7 @@
             <a:pPr>
               <a:defRPr sz="1000" b="0">
                 <a:solidFill>
-                  <a:srgbClr val="4B545D"/>
+                  <a:srgbClr val="4A4448"/>
                 </a:solidFill>
                 <a:latin typeface="DejaVu Sans"/>
               </a:defRPr>
@@ -4220,12 +4535,12 @@
 </file>
 
 <file path=ppt/slides/slide4.xml><?xml version="1.0" encoding="utf-8"?>
-<p:sld xmlns:a="http://schemas.openxmlformats.org/drawingml/2006/main" xmlns:p="http://schemas.openxmlformats.org/presentationml/2006/main" xmlns:r="http://schemas.openxmlformats.org/officeDocument/2006/relationships">
+<p:sld xmlns:a="http://schemas.openxmlformats.org/drawingml/2006/main" xmlns:r="http://schemas.openxmlformats.org/officeDocument/2006/relationships" xmlns:p="http://schemas.openxmlformats.org/presentationml/2006/main">
   <p:cSld>
     <p:bg>
       <p:bgPr>
         <a:solidFill>
-          <a:srgbClr val="F8FAFC"/>
+          <a:srgbClr val="FDF9F9"/>
         </a:solidFill>
         <a:effectLst/>
       </p:bgPr>
@@ -4236,7 +4551,14 @@
         <p:cNvGrpSpPr/>
         <p:nvPr/>
       </p:nvGrpSpPr>
-      <p:grpSpPr/>
+      <p:grpSpPr>
+        <a:xfrm>
+          <a:off x="0" y="0"/>
+          <a:ext cx="0" cy="0"/>
+          <a:chOff x="0" y="0"/>
+          <a:chExt cx="0" cy="0"/>
+        </a:xfrm>
+      </p:grpSpPr>
       <p:sp>
         <p:nvSpPr>
           <p:cNvPr id="2" name="Rectangle 1"/>
@@ -4252,7 +4574,7 @@
             <a:avLst/>
           </a:prstGeom>
           <a:solidFill>
-            <a:srgbClr val="3470A8"/>
+            <a:srgbClr val="C8102E"/>
           </a:solidFill>
           <a:ln>
             <a:noFill/>
@@ -4277,6 +4599,7 @@
           <a:lstStyle/>
           <a:p>
             <a:pPr algn="ctr"/>
+            <a:endParaRPr/>
           </a:p>
         </p:txBody>
       </p:sp>
@@ -4308,7 +4631,7 @@
               </a:lnSpc>
               <a:defRPr sz="2800" b="1">
                 <a:solidFill>
-                  <a:srgbClr val="1F3752"/>
+                  <a:srgbClr val="5B1220"/>
                 </a:solidFill>
                 <a:latin typeface="DejaVu Sans"/>
               </a:defRPr>
@@ -4334,7 +4657,7 @@
             <a:avLst/>
           </a:prstGeom>
           <a:solidFill>
-            <a:srgbClr val="3470A8"/>
+            <a:srgbClr val="C8102E"/>
           </a:solidFill>
           <a:ln>
             <a:noFill/>
@@ -4359,6 +4682,7 @@
           <a:lstStyle/>
           <a:p>
             <a:pPr algn="ctr"/>
+            <a:endParaRPr/>
           </a:p>
         </p:txBody>
       </p:sp>
@@ -4393,7 +4717,7 @@
               </a:spcAft>
               <a:defRPr sz="1800">
                 <a:solidFill>
-                  <a:srgbClr val="4B545D"/>
+                  <a:srgbClr val="4A4448"/>
                 </a:solidFill>
                 <a:latin typeface="DejaVu Sans"/>
               </a:defRPr>
@@ -4410,11 +4734,17 @@
           <p:cNvGraphicFramePr>
             <a:graphicFrameLocks noGrp="1"/>
           </p:cNvGraphicFramePr>
-          <p:nvPr/>
+          <p:nvPr>
+            <p:extLst>
+              <p:ext uri="{D42A27DB-BD31-4B8C-83A1-F6EECF244321}">
+                <p14:modId xmlns:p14="http://schemas.microsoft.com/office/powerpoint/2010/main" val="3302098944"/>
+              </p:ext>
+            </p:extLst>
+          </p:nvPr>
         </p:nvGraphicFramePr>
         <p:xfrm>
           <a:off x="822960" y="2202942"/>
-          <a:ext cx="10515600" cy="2761482"/>
+          <a:ext cx="10515600" cy="2231136"/>
         </p:xfrm>
         <a:graphic>
           <a:graphicData uri="http://schemas.openxmlformats.org/drawingml/2006/table">
@@ -4423,15 +4753,39 @@
                 <a:tableStyleId>{5C22544A-7EE6-4342-B048-85BDC9FD1C3A}</a:tableStyleId>
               </a:tblPr>
               <a:tblGrid>
-                <a:gridCol w="2628900"/>
-                <a:gridCol w="2628900"/>
-                <a:gridCol w="2628900"/>
-                <a:gridCol w="2628900"/>
+                <a:gridCol w="2628900">
+                  <a:extLst>
+                    <a:ext uri="{9D8B030D-6E8A-4147-A177-3AD203B41FA5}">
+                      <a16:colId xmlns:a16="http://schemas.microsoft.com/office/drawing/2014/main" val="20000"/>
+                    </a:ext>
+                  </a:extLst>
+                </a:gridCol>
+                <a:gridCol w="2628900">
+                  <a:extLst>
+                    <a:ext uri="{9D8B030D-6E8A-4147-A177-3AD203B41FA5}">
+                      <a16:colId xmlns:a16="http://schemas.microsoft.com/office/drawing/2014/main" val="20001"/>
+                    </a:ext>
+                  </a:extLst>
+                </a:gridCol>
+                <a:gridCol w="2628900">
+                  <a:extLst>
+                    <a:ext uri="{9D8B030D-6E8A-4147-A177-3AD203B41FA5}">
+                      <a16:colId xmlns:a16="http://schemas.microsoft.com/office/drawing/2014/main" val="20002"/>
+                    </a:ext>
+                  </a:extLst>
+                </a:gridCol>
+                <a:gridCol w="2628900">
+                  <a:extLst>
+                    <a:ext uri="{9D8B030D-6E8A-4147-A177-3AD203B41FA5}">
+                      <a16:colId xmlns:a16="http://schemas.microsoft.com/office/drawing/2014/main" val="20003"/>
+                    </a:ext>
+                  </a:extLst>
+                </a:gridCol>
               </a:tblGrid>
-              <a:tr h="460247">
+              <a:tr h="371856">
                 <a:tc>
                   <a:txBody>
-                    <a:bodyPr wrap="square"/>
+                    <a:bodyPr/>
                     <a:lstStyle/>
                     <a:p>
                       <a:pPr>
@@ -4440,7 +4794,7 @@
                         </a:lnSpc>
                       </a:pPr>
                       <a:r>
-                        <a:rPr b="1" sz="1400">
+                        <a:rPr sz="1400" b="1">
                           <a:solidFill>
                             <a:srgbClr val="FFFFFF"/>
                           </a:solidFill>
@@ -4452,13 +4806,13 @@
                   </a:txBody>
                   <a:tcPr>
                     <a:solidFill>
-                      <a:srgbClr val="1F3752"/>
+                      <a:srgbClr val="5B1220"/>
                     </a:solidFill>
                   </a:tcPr>
                 </a:tc>
                 <a:tc>
                   <a:txBody>
-                    <a:bodyPr wrap="square"/>
+                    <a:bodyPr/>
                     <a:lstStyle/>
                     <a:p>
                       <a:pPr>
@@ -4467,7 +4821,7 @@
                         </a:lnSpc>
                       </a:pPr>
                       <a:r>
-                        <a:rPr b="1" sz="1400">
+                        <a:rPr sz="1400" b="1">
                           <a:solidFill>
                             <a:srgbClr val="FFFFFF"/>
                           </a:solidFill>
@@ -4479,13 +4833,13 @@
                   </a:txBody>
                   <a:tcPr>
                     <a:solidFill>
-                      <a:srgbClr val="1F3752"/>
+                      <a:srgbClr val="5B1220"/>
                     </a:solidFill>
                   </a:tcPr>
                 </a:tc>
                 <a:tc>
                   <a:txBody>
-                    <a:bodyPr wrap="square"/>
+                    <a:bodyPr/>
                     <a:lstStyle/>
                     <a:p>
                       <a:pPr>
@@ -4494,7 +4848,7 @@
                         </a:lnSpc>
                       </a:pPr>
                       <a:r>
-                        <a:rPr b="1" sz="1400">
+                        <a:rPr sz="1400" b="1">
                           <a:solidFill>
                             <a:srgbClr val="FFFFFF"/>
                           </a:solidFill>
@@ -4506,13 +4860,13 @@
                   </a:txBody>
                   <a:tcPr>
                     <a:solidFill>
-                      <a:srgbClr val="1F3752"/>
+                      <a:srgbClr val="5B1220"/>
                     </a:solidFill>
                   </a:tcPr>
                 </a:tc>
                 <a:tc>
                   <a:txBody>
-                    <a:bodyPr wrap="square"/>
+                    <a:bodyPr/>
                     <a:lstStyle/>
                     <a:p>
                       <a:pPr>
@@ -4521,7 +4875,7 @@
                         </a:lnSpc>
                       </a:pPr>
                       <a:r>
-                        <a:rPr b="1" sz="1400">
+                        <a:rPr sz="1400" b="1">
                           <a:solidFill>
                             <a:srgbClr val="FFFFFF"/>
                           </a:solidFill>
@@ -4533,15 +4887,20 @@
                   </a:txBody>
                   <a:tcPr>
                     <a:solidFill>
-                      <a:srgbClr val="1F3752"/>
+                      <a:srgbClr val="5B1220"/>
                     </a:solidFill>
                   </a:tcPr>
                 </a:tc>
+                <a:extLst>
+                  <a:ext uri="{0D108BD9-81ED-4DB2-BD59-A6C34878D82A}">
+                    <a16:rowId xmlns:a16="http://schemas.microsoft.com/office/drawing/2014/main" val="10000"/>
+                  </a:ext>
+                </a:extLst>
               </a:tr>
-              <a:tr h="460247">
+              <a:tr h="371856">
                 <a:tc>
                   <a:txBody>
-                    <a:bodyPr wrap="square"/>
+                    <a:bodyPr/>
                     <a:lstStyle/>
                     <a:p>
                       <a:pPr>
@@ -4552,7 +4911,7 @@
                       <a:r>
                         <a:rPr sz="1400">
                           <a:solidFill>
-                            <a:srgbClr val="1F3752"/>
+                            <a:srgbClr val="5B1220"/>
                           </a:solidFill>
                           <a:latin typeface="DejaVu Sans"/>
                         </a:rPr>
@@ -4568,7 +4927,7 @@
                 </a:tc>
                 <a:tc>
                   <a:txBody>
-                    <a:bodyPr wrap="square"/>
+                    <a:bodyPr/>
                     <a:lstStyle/>
                     <a:p>
                       <a:pPr>
@@ -4579,7 +4938,7 @@
                       <a:r>
                         <a:rPr sz="1400">
                           <a:solidFill>
-                            <a:srgbClr val="4B545D"/>
+                            <a:srgbClr val="4A4448"/>
                           </a:solidFill>
                           <a:latin typeface="DejaVu Sans"/>
                         </a:rPr>
@@ -4595,7 +4954,7 @@
                 </a:tc>
                 <a:tc>
                   <a:txBody>
-                    <a:bodyPr wrap="square"/>
+                    <a:bodyPr/>
                     <a:lstStyle/>
                     <a:p>
                       <a:pPr>
@@ -4606,7 +4965,7 @@
                       <a:r>
                         <a:rPr sz="1400">
                           <a:solidFill>
-                            <a:srgbClr val="4B545D"/>
+                            <a:srgbClr val="4A4448"/>
                           </a:solidFill>
                           <a:latin typeface="DejaVu Sans"/>
                         </a:rPr>
@@ -4622,7 +4981,7 @@
                 </a:tc>
                 <a:tc>
                   <a:txBody>
-                    <a:bodyPr wrap="square"/>
+                    <a:bodyPr/>
                     <a:lstStyle/>
                     <a:p>
                       <a:pPr>
@@ -4633,7 +4992,7 @@
                       <a:r>
                         <a:rPr sz="1400">
                           <a:solidFill>
-                            <a:srgbClr val="4B545D"/>
+                            <a:srgbClr val="4A4448"/>
                           </a:solidFill>
                           <a:latin typeface="DejaVu Sans"/>
                         </a:rPr>
@@ -4647,11 +5006,16 @@
                     </a:solidFill>
                   </a:tcPr>
                 </a:tc>
+                <a:extLst>
+                  <a:ext uri="{0D108BD9-81ED-4DB2-BD59-A6C34878D82A}">
+                    <a16:rowId xmlns:a16="http://schemas.microsoft.com/office/drawing/2014/main" val="10001"/>
+                  </a:ext>
+                </a:extLst>
               </a:tr>
-              <a:tr h="460247">
+              <a:tr h="371856">
                 <a:tc>
                   <a:txBody>
-                    <a:bodyPr wrap="square"/>
+                    <a:bodyPr/>
                     <a:lstStyle/>
                     <a:p>
                       <a:pPr>
@@ -4662,7 +5026,7 @@
                       <a:r>
                         <a:rPr sz="1400">
                           <a:solidFill>
-                            <a:srgbClr val="1F3752"/>
+                            <a:srgbClr val="5B1220"/>
                           </a:solidFill>
                           <a:latin typeface="DejaVu Sans"/>
                         </a:rPr>
@@ -4672,13 +5036,13 @@
                   </a:txBody>
                   <a:tcPr>
                     <a:solidFill>
-                      <a:srgbClr val="E8F0F7"/>
+                      <a:srgbClr val="FBEBEC"/>
                     </a:solidFill>
                   </a:tcPr>
                 </a:tc>
                 <a:tc>
                   <a:txBody>
-                    <a:bodyPr wrap="square"/>
+                    <a:bodyPr/>
                     <a:lstStyle/>
                     <a:p>
                       <a:pPr>
@@ -4689,7 +5053,7 @@
                       <a:r>
                         <a:rPr sz="1400">
                           <a:solidFill>
-                            <a:srgbClr val="4B545D"/>
+                            <a:srgbClr val="4A4448"/>
                           </a:solidFill>
                           <a:latin typeface="DejaVu Sans"/>
                         </a:rPr>
@@ -4699,13 +5063,13 @@
                   </a:txBody>
                   <a:tcPr>
                     <a:solidFill>
-                      <a:srgbClr val="E8F0F7"/>
+                      <a:srgbClr val="FBEBEC"/>
                     </a:solidFill>
                   </a:tcPr>
                 </a:tc>
                 <a:tc>
                   <a:txBody>
-                    <a:bodyPr wrap="square"/>
+                    <a:bodyPr/>
                     <a:lstStyle/>
                     <a:p>
                       <a:pPr>
@@ -4716,7 +5080,7 @@
                       <a:r>
                         <a:rPr sz="1400">
                           <a:solidFill>
-                            <a:srgbClr val="4B545D"/>
+                            <a:srgbClr val="4A4448"/>
                           </a:solidFill>
                           <a:latin typeface="DejaVu Sans"/>
                         </a:rPr>
@@ -4726,13 +5090,13 @@
                   </a:txBody>
                   <a:tcPr>
                     <a:solidFill>
-                      <a:srgbClr val="E8F0F7"/>
+                      <a:srgbClr val="FBEBEC"/>
                     </a:solidFill>
                   </a:tcPr>
                 </a:tc>
                 <a:tc>
                   <a:txBody>
-                    <a:bodyPr wrap="square"/>
+                    <a:bodyPr/>
                     <a:lstStyle/>
                     <a:p>
                       <a:pPr>
@@ -4743,7 +5107,7 @@
                       <a:r>
                         <a:rPr sz="1400">
                           <a:solidFill>
-                            <a:srgbClr val="4B545D"/>
+                            <a:srgbClr val="4A4448"/>
                           </a:solidFill>
                           <a:latin typeface="DejaVu Sans"/>
                         </a:rPr>
@@ -4753,15 +5117,20 @@
                   </a:txBody>
                   <a:tcPr>
                     <a:solidFill>
-                      <a:srgbClr val="E8F0F7"/>
+                      <a:srgbClr val="FBEBEC"/>
                     </a:solidFill>
                   </a:tcPr>
                 </a:tc>
+                <a:extLst>
+                  <a:ext uri="{0D108BD9-81ED-4DB2-BD59-A6C34878D82A}">
+                    <a16:rowId xmlns:a16="http://schemas.microsoft.com/office/drawing/2014/main" val="10002"/>
+                  </a:ext>
+                </a:extLst>
               </a:tr>
-              <a:tr h="460247">
+              <a:tr h="371856">
                 <a:tc>
                   <a:txBody>
-                    <a:bodyPr wrap="square"/>
+                    <a:bodyPr/>
                     <a:lstStyle/>
                     <a:p>
                       <a:pPr>
@@ -4772,7 +5141,7 @@
                       <a:r>
                         <a:rPr sz="1400">
                           <a:solidFill>
-                            <a:srgbClr val="1F3752"/>
+                            <a:srgbClr val="5B1220"/>
                           </a:solidFill>
                           <a:latin typeface="DejaVu Sans"/>
                         </a:rPr>
@@ -4788,7 +5157,7 @@
                 </a:tc>
                 <a:tc>
                   <a:txBody>
-                    <a:bodyPr wrap="square"/>
+                    <a:bodyPr/>
                     <a:lstStyle/>
                     <a:p>
                       <a:pPr>
@@ -4799,7 +5168,7 @@
                       <a:r>
                         <a:rPr sz="1400">
                           <a:solidFill>
-                            <a:srgbClr val="4B545D"/>
+                            <a:srgbClr val="4A4448"/>
                           </a:solidFill>
                           <a:latin typeface="DejaVu Sans"/>
                         </a:rPr>
@@ -4815,7 +5184,7 @@
                 </a:tc>
                 <a:tc>
                   <a:txBody>
-                    <a:bodyPr wrap="square"/>
+                    <a:bodyPr/>
                     <a:lstStyle/>
                     <a:p>
                       <a:pPr>
@@ -4826,7 +5195,7 @@
                       <a:r>
                         <a:rPr sz="1400">
                           <a:solidFill>
-                            <a:srgbClr val="4B545D"/>
+                            <a:srgbClr val="4A4448"/>
                           </a:solidFill>
                           <a:latin typeface="DejaVu Sans"/>
                         </a:rPr>
@@ -4842,7 +5211,7 @@
                 </a:tc>
                 <a:tc>
                   <a:txBody>
-                    <a:bodyPr wrap="square"/>
+                    <a:bodyPr/>
                     <a:lstStyle/>
                     <a:p>
                       <a:pPr>
@@ -4853,7 +5222,7 @@
                       <a:r>
                         <a:rPr sz="1400">
                           <a:solidFill>
-                            <a:srgbClr val="4B545D"/>
+                            <a:srgbClr val="4A4448"/>
                           </a:solidFill>
                           <a:latin typeface="DejaVu Sans"/>
                         </a:rPr>
@@ -4867,11 +5236,16 @@
                     </a:solidFill>
                   </a:tcPr>
                 </a:tc>
+                <a:extLst>
+                  <a:ext uri="{0D108BD9-81ED-4DB2-BD59-A6C34878D82A}">
+                    <a16:rowId xmlns:a16="http://schemas.microsoft.com/office/drawing/2014/main" val="10003"/>
+                  </a:ext>
+                </a:extLst>
               </a:tr>
-              <a:tr h="460247">
+              <a:tr h="371856">
                 <a:tc>
                   <a:txBody>
-                    <a:bodyPr wrap="square"/>
+                    <a:bodyPr/>
                     <a:lstStyle/>
                     <a:p>
                       <a:pPr>
@@ -4882,7 +5256,7 @@
                       <a:r>
                         <a:rPr sz="1400">
                           <a:solidFill>
-                            <a:srgbClr val="1F3752"/>
+                            <a:srgbClr val="5B1220"/>
                           </a:solidFill>
                           <a:latin typeface="DejaVu Sans"/>
                         </a:rPr>
@@ -4892,13 +5266,13 @@
                   </a:txBody>
                   <a:tcPr>
                     <a:solidFill>
-                      <a:srgbClr val="E8F0F7"/>
+                      <a:srgbClr val="FBEBEC"/>
                     </a:solidFill>
                   </a:tcPr>
                 </a:tc>
                 <a:tc>
                   <a:txBody>
-                    <a:bodyPr wrap="square"/>
+                    <a:bodyPr/>
                     <a:lstStyle/>
                     <a:p>
                       <a:pPr>
@@ -4909,7 +5283,7 @@
                       <a:r>
                         <a:rPr sz="1400">
                           <a:solidFill>
-                            <a:srgbClr val="4B545D"/>
+                            <a:srgbClr val="4A4448"/>
                           </a:solidFill>
                           <a:latin typeface="DejaVu Sans"/>
                         </a:rPr>
@@ -4919,13 +5293,13 @@
                   </a:txBody>
                   <a:tcPr>
                     <a:solidFill>
-                      <a:srgbClr val="E8F0F7"/>
+                      <a:srgbClr val="FBEBEC"/>
                     </a:solidFill>
                   </a:tcPr>
                 </a:tc>
                 <a:tc>
                   <a:txBody>
-                    <a:bodyPr wrap="square"/>
+                    <a:bodyPr/>
                     <a:lstStyle/>
                     <a:p>
                       <a:pPr>
@@ -4936,7 +5310,7 @@
                       <a:r>
                         <a:rPr sz="1400">
                           <a:solidFill>
-                            <a:srgbClr val="4B545D"/>
+                            <a:srgbClr val="4A4448"/>
                           </a:solidFill>
                           <a:latin typeface="DejaVu Sans"/>
                         </a:rPr>
@@ -4946,13 +5320,13 @@
                   </a:txBody>
                   <a:tcPr>
                     <a:solidFill>
-                      <a:srgbClr val="E8F0F7"/>
+                      <a:srgbClr val="FBEBEC"/>
                     </a:solidFill>
                   </a:tcPr>
                 </a:tc>
                 <a:tc>
                   <a:txBody>
-                    <a:bodyPr wrap="square"/>
+                    <a:bodyPr/>
                     <a:lstStyle/>
                     <a:p>
                       <a:pPr>
@@ -4963,7 +5337,7 @@
                       <a:r>
                         <a:rPr sz="1400">
                           <a:solidFill>
-                            <a:srgbClr val="4B545D"/>
+                            <a:srgbClr val="4A4448"/>
                           </a:solidFill>
                           <a:latin typeface="DejaVu Sans"/>
                         </a:rPr>
@@ -4973,15 +5347,20 @@
                   </a:txBody>
                   <a:tcPr>
                     <a:solidFill>
-                      <a:srgbClr val="E8F0F7"/>
+                      <a:srgbClr val="FBEBEC"/>
                     </a:solidFill>
                   </a:tcPr>
                 </a:tc>
+                <a:extLst>
+                  <a:ext uri="{0D108BD9-81ED-4DB2-BD59-A6C34878D82A}">
+                    <a16:rowId xmlns:a16="http://schemas.microsoft.com/office/drawing/2014/main" val="10004"/>
+                  </a:ext>
+                </a:extLst>
               </a:tr>
-              <a:tr h="460247">
+              <a:tr h="371856">
                 <a:tc>
                   <a:txBody>
-                    <a:bodyPr wrap="square"/>
+                    <a:bodyPr/>
                     <a:lstStyle/>
                     <a:p>
                       <a:pPr>
@@ -4992,7 +5371,7 @@
                       <a:r>
                         <a:rPr sz="1400">
                           <a:solidFill>
-                            <a:srgbClr val="1F3752"/>
+                            <a:srgbClr val="5B1220"/>
                           </a:solidFill>
                           <a:latin typeface="DejaVu Sans"/>
                         </a:rPr>
@@ -5008,7 +5387,7 @@
                 </a:tc>
                 <a:tc>
                   <a:txBody>
-                    <a:bodyPr wrap="square"/>
+                    <a:bodyPr/>
                     <a:lstStyle/>
                     <a:p>
                       <a:pPr>
@@ -5019,7 +5398,7 @@
                       <a:r>
                         <a:rPr sz="1400">
                           <a:solidFill>
-                            <a:srgbClr val="4B545D"/>
+                            <a:srgbClr val="4A4448"/>
                           </a:solidFill>
                           <a:latin typeface="DejaVu Sans"/>
                         </a:rPr>
@@ -5035,7 +5414,7 @@
                 </a:tc>
                 <a:tc>
                   <a:txBody>
-                    <a:bodyPr wrap="square"/>
+                    <a:bodyPr/>
                     <a:lstStyle/>
                     <a:p>
                       <a:pPr>
@@ -5046,7 +5425,7 @@
                       <a:r>
                         <a:rPr sz="1400">
                           <a:solidFill>
-                            <a:srgbClr val="4B545D"/>
+                            <a:srgbClr val="4A4448"/>
                           </a:solidFill>
                           <a:latin typeface="DejaVu Sans"/>
                         </a:rPr>
@@ -5062,7 +5441,7 @@
                 </a:tc>
                 <a:tc>
                   <a:txBody>
-                    <a:bodyPr wrap="square"/>
+                    <a:bodyPr/>
                     <a:lstStyle/>
                     <a:p>
                       <a:pPr>
@@ -5073,7 +5452,7 @@
                       <a:r>
                         <a:rPr sz="1400">
                           <a:solidFill>
-                            <a:srgbClr val="4B545D"/>
+                            <a:srgbClr val="4A4448"/>
                           </a:solidFill>
                           <a:latin typeface="DejaVu Sans"/>
                         </a:rPr>
@@ -5087,6 +5466,11 @@
                     </a:solidFill>
                   </a:tcPr>
                 </a:tc>
+                <a:extLst>
+                  <a:ext uri="{0D108BD9-81ED-4DB2-BD59-A6C34878D82A}">
+                    <a16:rowId xmlns:a16="http://schemas.microsoft.com/office/drawing/2014/main" val="10005"/>
+                  </a:ext>
+                </a:extLst>
               </a:tr>
             </a:tbl>
           </a:graphicData>
@@ -5100,8 +5484,8 @@
         </p:nvSpPr>
         <p:spPr>
           <a:xfrm>
-            <a:off x="822960" y="5101584"/>
-            <a:ext cx="10515600" cy="707390"/>
+            <a:off x="822960" y="4571238"/>
+            <a:ext cx="10515600" cy="1275080"/>
           </a:xfrm>
           <a:prstGeom prst="rect">
             <a:avLst/>
@@ -5123,7 +5507,7 @@
               </a:spcAft>
               <a:defRPr sz="1300">
                 <a:solidFill>
-                  <a:srgbClr val="4B545D"/>
+                  <a:srgbClr val="4A4448"/>
                 </a:solidFill>
                 <a:latin typeface="DejaVu Sans"/>
               </a:defRPr>
@@ -5142,7 +5526,7 @@
               </a:spcAft>
               <a:defRPr sz="1300">
                 <a:solidFill>
-                  <a:srgbClr val="4B545D"/>
+                  <a:srgbClr val="4A4448"/>
                 </a:solidFill>
                 <a:latin typeface="DejaVu Sans"/>
               </a:defRPr>
@@ -5150,6 +5534,55 @@
             <a:r>
               <a:t>•  Calendar wall-clock duration may not match the official SLA clock.</a:t>
             </a:r>
+          </a:p>
+          <a:p>
+            <a:pPr>
+              <a:lnSpc>
+                <a:spcPct val="125000"/>
+              </a:lnSpc>
+              <a:spcAft>
+                <a:spcPts val="0"/>
+              </a:spcAft>
+              <a:defRPr sz="1500" b="1">
+                <a:solidFill>
+                  <a:srgbClr val="C8102E"/>
+                </a:solidFill>
+                <a:latin typeface="DejaVu Sans"/>
+              </a:defRPr>
+            </a:pPr>
+            <a:r>
+              <a:t>Bottom line: roughly one ticket in five met its configured reference, consistently across priority levels.</a:t>
+            </a:r>
+          </a:p>
+        </p:txBody>
+      </p:sp>
+      <p:sp>
+        <p:nvSpPr>
+          <p:cNvPr id="90" name="Rectangle Accent 90"/>
+          <p:cNvSpPr/>
+          <p:nvPr/>
+        </p:nvSpPr>
+        <p:spPr>
+          <a:xfrm>
+            <a:off x="621792" y="5324348"/>
+            <a:ext cx="50292" cy="476250"/>
+          </a:xfrm>
+          <a:prstGeom prst="rect">
+            <a:avLst/>
+          </a:prstGeom>
+          <a:solidFill>
+            <a:srgbClr val="C8102E"/>
+          </a:solidFill>
+          <a:ln>
+            <a:noFill/>
+          </a:ln>
+        </p:spPr>
+        <p:txBody>
+          <a:bodyPr rtlCol="0" anchor="ctr"/>
+          <a:lstStyle/>
+          <a:p>
+            <a:pPr algn="ctr"/>
+            <a:endParaRPr/>
           </a:p>
         </p:txBody>
       </p:sp>
@@ -5178,7 +5611,7 @@
             <a:pPr>
               <a:defRPr sz="1000">
                 <a:solidFill>
-                  <a:srgbClr val="4B545D"/>
+                  <a:srgbClr val="4A4448"/>
                 </a:solidFill>
               </a:defRPr>
             </a:pPr>
@@ -5213,7 +5646,7 @@
             <a:pPr>
               <a:defRPr sz="1000" b="0">
                 <a:solidFill>
-                  <a:srgbClr val="4B545D"/>
+                  <a:srgbClr val="4A4448"/>
                 </a:solidFill>
                 <a:latin typeface="DejaVu Sans"/>
               </a:defRPr>
@@ -5233,12 +5666,12 @@
 </file>
 
 <file path=ppt/slides/slide5.xml><?xml version="1.0" encoding="utf-8"?>
-<p:sld xmlns:a="http://schemas.openxmlformats.org/drawingml/2006/main" xmlns:p="http://schemas.openxmlformats.org/presentationml/2006/main" xmlns:r="http://schemas.openxmlformats.org/officeDocument/2006/relationships">
+<p:sld xmlns:a="http://schemas.openxmlformats.org/drawingml/2006/main" xmlns:r="http://schemas.openxmlformats.org/officeDocument/2006/relationships" xmlns:p="http://schemas.openxmlformats.org/presentationml/2006/main">
   <p:cSld>
     <p:bg>
       <p:bgPr>
         <a:solidFill>
-          <a:srgbClr val="F8FAFC"/>
+          <a:srgbClr val="FDF9F9"/>
         </a:solidFill>
         <a:effectLst/>
       </p:bgPr>
@@ -5249,7 +5682,14 @@
         <p:cNvGrpSpPr/>
         <p:nvPr/>
       </p:nvGrpSpPr>
-      <p:grpSpPr/>
+      <p:grpSpPr>
+        <a:xfrm>
+          <a:off x="0" y="0"/>
+          <a:ext cx="0" cy="0"/>
+          <a:chOff x="0" y="0"/>
+          <a:chExt cx="0" cy="0"/>
+        </a:xfrm>
+      </p:grpSpPr>
       <p:sp>
         <p:nvSpPr>
           <p:cNvPr id="2" name="Rectangle 1"/>
@@ -5265,7 +5705,7 @@
             <a:avLst/>
           </a:prstGeom>
           <a:solidFill>
-            <a:srgbClr val="3470A8"/>
+            <a:srgbClr val="C8102E"/>
           </a:solidFill>
           <a:ln>
             <a:noFill/>
@@ -5290,6 +5730,7 @@
           <a:lstStyle/>
           <a:p>
             <a:pPr algn="ctr"/>
+            <a:endParaRPr/>
           </a:p>
         </p:txBody>
       </p:sp>
@@ -5321,7 +5762,7 @@
               </a:lnSpc>
               <a:defRPr sz="2800" b="1">
                 <a:solidFill>
-                  <a:srgbClr val="1F3752"/>
+                  <a:srgbClr val="5B1220"/>
                 </a:solidFill>
                 <a:latin typeface="DejaVu Sans"/>
               </a:defRPr>
@@ -5347,7 +5788,7 @@
             <a:avLst/>
           </a:prstGeom>
           <a:solidFill>
-            <a:srgbClr val="3470A8"/>
+            <a:srgbClr val="C8102E"/>
           </a:solidFill>
           <a:ln>
             <a:noFill/>
@@ -5372,6 +5813,7 @@
           <a:lstStyle/>
           <a:p>
             <a:pPr algn="ctr"/>
+            <a:endParaRPr/>
           </a:p>
         </p:txBody>
       </p:sp>
@@ -5384,7 +5826,7 @@
         <p:spPr>
           <a:xfrm>
             <a:off x="822960" y="1536192"/>
-            <a:ext cx="10515600" cy="2758440"/>
+            <a:ext cx="10515600" cy="3326130"/>
           </a:xfrm>
           <a:prstGeom prst="rect">
             <a:avLst/>
@@ -5406,7 +5848,7 @@
               </a:spcAft>
               <a:defRPr sz="1800">
                 <a:solidFill>
-                  <a:srgbClr val="4B545D"/>
+                  <a:srgbClr val="4A4448"/>
                 </a:solidFill>
                 <a:latin typeface="DejaVu Sans"/>
               </a:defRPr>
@@ -5425,7 +5867,7 @@
               </a:spcAft>
               <a:defRPr sz="1800">
                 <a:solidFill>
-                  <a:srgbClr val="4B545D"/>
+                  <a:srgbClr val="4A4448"/>
                 </a:solidFill>
                 <a:latin typeface="DejaVu Sans"/>
               </a:defRPr>
@@ -5444,7 +5886,7 @@
               </a:spcAft>
               <a:defRPr sz="1800">
                 <a:solidFill>
-                  <a:srgbClr val="4B545D"/>
+                  <a:srgbClr val="4A4448"/>
                 </a:solidFill>
                 <a:latin typeface="DejaVu Sans"/>
               </a:defRPr>
@@ -5463,7 +5905,7 @@
               </a:spcAft>
               <a:defRPr sz="1800">
                 <a:solidFill>
-                  <a:srgbClr val="4B545D"/>
+                  <a:srgbClr val="4A4448"/>
                 </a:solidFill>
                 <a:latin typeface="DejaVu Sans"/>
               </a:defRPr>
@@ -5482,7 +5924,7 @@
               </a:spcAft>
               <a:defRPr sz="1500">
                 <a:solidFill>
-                  <a:srgbClr val="4B545D"/>
+                  <a:srgbClr val="4A4448"/>
                 </a:solidFill>
                 <a:latin typeface="DejaVu Sans"/>
               </a:defRPr>
@@ -5490,6 +5932,55 @@
             <a:r>
               <a:t>•  A month forecast is one estimate per day, not a guaranteed monthly total. These old results do not validate current demand.</a:t>
             </a:r>
+          </a:p>
+          <a:p>
+            <a:pPr>
+              <a:lnSpc>
+                <a:spcPct val="125000"/>
+              </a:lnSpc>
+              <a:spcAft>
+                <a:spcPts val="0"/>
+              </a:spcAft>
+              <a:defRPr sz="1500" b="1">
+                <a:solidFill>
+                  <a:srgbClr val="C8102E"/>
+                </a:solidFill>
+                <a:latin typeface="DejaVu Sans"/>
+              </a:defRPr>
+            </a:pPr>
+            <a:r>
+              <a:t>Bottom line: the selected model lands within a few tickets per day of actuals, but this is a historical result, not a live forecast.</a:t>
+            </a:r>
+          </a:p>
+        </p:txBody>
+      </p:sp>
+      <p:sp>
+        <p:nvSpPr>
+          <p:cNvPr id="90" name="Rectangle Accent 90"/>
+          <p:cNvSpPr/>
+          <p:nvPr/>
+        </p:nvSpPr>
+        <p:spPr>
+          <a:xfrm>
+            <a:off x="621792" y="4340352"/>
+            <a:ext cx="50292" cy="476250"/>
+          </a:xfrm>
+          <a:prstGeom prst="rect">
+            <a:avLst/>
+          </a:prstGeom>
+          <a:solidFill>
+            <a:srgbClr val="C8102E"/>
+          </a:solidFill>
+          <a:ln>
+            <a:noFill/>
+          </a:ln>
+        </p:spPr>
+        <p:txBody>
+          <a:bodyPr rtlCol="0" anchor="ctr"/>
+          <a:lstStyle/>
+          <a:p>
+            <a:pPr algn="ctr"/>
+            <a:endParaRPr/>
           </a:p>
         </p:txBody>
       </p:sp>
@@ -5518,7 +6009,7 @@
             <a:pPr>
               <a:defRPr sz="1000">
                 <a:solidFill>
-                  <a:srgbClr val="4B545D"/>
+                  <a:srgbClr val="4A4448"/>
                 </a:solidFill>
               </a:defRPr>
             </a:pPr>
@@ -5553,7 +6044,7 @@
             <a:pPr>
               <a:defRPr sz="1000" b="0">
                 <a:solidFill>
-                  <a:srgbClr val="4B545D"/>
+                  <a:srgbClr val="4A4448"/>
                 </a:solidFill>
                 <a:latin typeface="DejaVu Sans"/>
               </a:defRPr>
@@ -5573,12 +6064,12 @@
 </file>
 
 <file path=ppt/slides/slide6.xml><?xml version="1.0" encoding="utf-8"?>
-<p:sld xmlns:a="http://schemas.openxmlformats.org/drawingml/2006/main" xmlns:p="http://schemas.openxmlformats.org/presentationml/2006/main" xmlns:r="http://schemas.openxmlformats.org/officeDocument/2006/relationships">
+<p:sld xmlns:a="http://schemas.openxmlformats.org/drawingml/2006/main" xmlns:r="http://schemas.openxmlformats.org/officeDocument/2006/relationships" xmlns:p="http://schemas.openxmlformats.org/presentationml/2006/main">
   <p:cSld>
     <p:bg>
       <p:bgPr>
         <a:solidFill>
-          <a:srgbClr val="F8FAFC"/>
+          <a:srgbClr val="FDF9F9"/>
         </a:solidFill>
         <a:effectLst/>
       </p:bgPr>
@@ -5589,7 +6080,14 @@
         <p:cNvGrpSpPr/>
         <p:nvPr/>
       </p:nvGrpSpPr>
-      <p:grpSpPr/>
+      <p:grpSpPr>
+        <a:xfrm>
+          <a:off x="0" y="0"/>
+          <a:ext cx="0" cy="0"/>
+          <a:chOff x="0" y="0"/>
+          <a:chExt cx="0" cy="0"/>
+        </a:xfrm>
+      </p:grpSpPr>
       <p:sp>
         <p:nvSpPr>
           <p:cNvPr id="2" name="Rectangle 1"/>
@@ -5605,7 +6103,7 @@
             <a:avLst/>
           </a:prstGeom>
           <a:solidFill>
-            <a:srgbClr val="3470A8"/>
+            <a:srgbClr val="C8102E"/>
           </a:solidFill>
           <a:ln>
             <a:noFill/>
@@ -5630,6 +6128,7 @@
           <a:lstStyle/>
           <a:p>
             <a:pPr algn="ctr"/>
+            <a:endParaRPr/>
           </a:p>
         </p:txBody>
       </p:sp>
@@ -5661,7 +6160,7 @@
               </a:lnSpc>
               <a:defRPr sz="2800" b="1">
                 <a:solidFill>
-                  <a:srgbClr val="1F3752"/>
+                  <a:srgbClr val="5B1220"/>
                 </a:solidFill>
                 <a:latin typeface="DejaVu Sans"/>
               </a:defRPr>
@@ -5687,7 +6186,7 @@
             <a:avLst/>
           </a:prstGeom>
           <a:solidFill>
-            <a:srgbClr val="3470A8"/>
+            <a:srgbClr val="C8102E"/>
           </a:solidFill>
           <a:ln>
             <a:noFill/>
@@ -5712,6 +6211,7 @@
           <a:lstStyle/>
           <a:p>
             <a:pPr algn="ctr"/>
+            <a:endParaRPr/>
           </a:p>
         </p:txBody>
       </p:sp>
@@ -5724,7 +6224,7 @@
         <p:spPr>
           <a:xfrm>
             <a:off x="822960" y="1536192"/>
-            <a:ext cx="10515600" cy="2415540"/>
+            <a:ext cx="10515600" cy="2983230"/>
           </a:xfrm>
           <a:prstGeom prst="rect">
             <a:avLst/>
@@ -5746,7 +6246,7 @@
               </a:spcAft>
               <a:defRPr sz="1800">
                 <a:solidFill>
-                  <a:srgbClr val="4B545D"/>
+                  <a:srgbClr val="4A4448"/>
                 </a:solidFill>
                 <a:latin typeface="DejaVu Sans"/>
               </a:defRPr>
@@ -5765,7 +6265,7 @@
               </a:spcAft>
               <a:defRPr sz="1800">
                 <a:solidFill>
-                  <a:srgbClr val="4B545D"/>
+                  <a:srgbClr val="4A4448"/>
                 </a:solidFill>
                 <a:latin typeface="DejaVu Sans"/>
               </a:defRPr>
@@ -5784,7 +6284,7 @@
               </a:spcAft>
               <a:defRPr sz="1800">
                 <a:solidFill>
-                  <a:srgbClr val="4B545D"/>
+                  <a:srgbClr val="4A4448"/>
                 </a:solidFill>
                 <a:latin typeface="DejaVu Sans"/>
               </a:defRPr>
@@ -5803,7 +6303,7 @@
               </a:spcAft>
               <a:defRPr sz="1800">
                 <a:solidFill>
-                  <a:srgbClr val="4B545D"/>
+                  <a:srgbClr val="4A4448"/>
                 </a:solidFill>
                 <a:latin typeface="DejaVu Sans"/>
               </a:defRPr>
@@ -5811,6 +6311,55 @@
             <a:r>
               <a:t>•  Intervals and errors may change when source coverage or operations change.</a:t>
             </a:r>
+          </a:p>
+          <a:p>
+            <a:pPr>
+              <a:lnSpc>
+                <a:spcPct val="125000"/>
+              </a:lnSpc>
+              <a:spcAft>
+                <a:spcPts val="0"/>
+              </a:spcAft>
+              <a:defRPr sz="1500" b="1">
+                <a:solidFill>
+                  <a:srgbClr val="C8102E"/>
+                </a:solidFill>
+                <a:latin typeface="DejaVu Sans"/>
+              </a:defRPr>
+            </a:pPr>
+            <a:r>
+              <a:t>Bottom line: these numbers describe past accuracy only; they do not predict today's volume or guarantee future performance.</a:t>
+            </a:r>
+          </a:p>
+        </p:txBody>
+      </p:sp>
+      <p:sp>
+        <p:nvSpPr>
+          <p:cNvPr id="90" name="Rectangle Accent 90"/>
+          <p:cNvSpPr/>
+          <p:nvPr/>
+        </p:nvSpPr>
+        <p:spPr>
+          <a:xfrm>
+            <a:off x="621792" y="3611880"/>
+            <a:ext cx="50292" cy="502920"/>
+          </a:xfrm>
+          <a:prstGeom prst="rect">
+            <a:avLst/>
+          </a:prstGeom>
+          <a:solidFill>
+            <a:srgbClr val="C8102E"/>
+          </a:solidFill>
+          <a:ln>
+            <a:noFill/>
+          </a:ln>
+        </p:spPr>
+        <p:txBody>
+          <a:bodyPr rtlCol="0" anchor="ctr"/>
+          <a:lstStyle/>
+          <a:p>
+            <a:pPr algn="ctr"/>
+            <a:endParaRPr/>
           </a:p>
         </p:txBody>
       </p:sp>
@@ -5839,7 +6388,7 @@
             <a:pPr>
               <a:defRPr sz="1000">
                 <a:solidFill>
-                  <a:srgbClr val="4B545D"/>
+                  <a:srgbClr val="4A4448"/>
                 </a:solidFill>
               </a:defRPr>
             </a:pPr>
@@ -5874,7 +6423,7 @@
             <a:pPr>
               <a:defRPr sz="1000" b="0">
                 <a:solidFill>
-                  <a:srgbClr val="4B545D"/>
+                  <a:srgbClr val="4A4448"/>
                 </a:solidFill>
                 <a:latin typeface="DejaVu Sans"/>
               </a:defRPr>
@@ -5894,12 +6443,12 @@
 </file>
 
 <file path=ppt/slides/slide7.xml><?xml version="1.0" encoding="utf-8"?>
-<p:sld xmlns:a="http://schemas.openxmlformats.org/drawingml/2006/main" xmlns:p="http://schemas.openxmlformats.org/presentationml/2006/main" xmlns:r="http://schemas.openxmlformats.org/officeDocument/2006/relationships">
+<p:sld xmlns:a="http://schemas.openxmlformats.org/drawingml/2006/main" xmlns:r="http://schemas.openxmlformats.org/officeDocument/2006/relationships" xmlns:p="http://schemas.openxmlformats.org/presentationml/2006/main">
   <p:cSld>
     <p:bg>
       <p:bgPr>
         <a:solidFill>
-          <a:srgbClr val="F8FAFC"/>
+          <a:srgbClr val="FDF9F9"/>
         </a:solidFill>
         <a:effectLst/>
       </p:bgPr>
@@ -5910,7 +6459,14 @@
         <p:cNvGrpSpPr/>
         <p:nvPr/>
       </p:nvGrpSpPr>
-      <p:grpSpPr/>
+      <p:grpSpPr>
+        <a:xfrm>
+          <a:off x="0" y="0"/>
+          <a:ext cx="0" cy="0"/>
+          <a:chOff x="0" y="0"/>
+          <a:chExt cx="0" cy="0"/>
+        </a:xfrm>
+      </p:grpSpPr>
       <p:sp>
         <p:nvSpPr>
           <p:cNvPr id="2" name="Rectangle 1"/>
@@ -5926,7 +6482,7 @@
             <a:avLst/>
           </a:prstGeom>
           <a:solidFill>
-            <a:srgbClr val="3470A8"/>
+            <a:srgbClr val="C8102E"/>
           </a:solidFill>
           <a:ln>
             <a:noFill/>
@@ -5951,6 +6507,7 @@
           <a:lstStyle/>
           <a:p>
             <a:pPr algn="ctr"/>
+            <a:endParaRPr/>
           </a:p>
         </p:txBody>
       </p:sp>
@@ -5982,7 +6539,7 @@
               </a:lnSpc>
               <a:defRPr sz="2800" b="1">
                 <a:solidFill>
-                  <a:srgbClr val="1F3752"/>
+                  <a:srgbClr val="5B1220"/>
                 </a:solidFill>
                 <a:latin typeface="DejaVu Sans"/>
               </a:defRPr>
@@ -6008,7 +6565,7 @@
             <a:avLst/>
           </a:prstGeom>
           <a:solidFill>
-            <a:srgbClr val="3470A8"/>
+            <a:srgbClr val="C8102E"/>
           </a:solidFill>
           <a:ln>
             <a:noFill/>
@@ -6033,6 +6590,7 @@
           <a:lstStyle/>
           <a:p>
             <a:pPr algn="ctr"/>
+            <a:endParaRPr/>
           </a:p>
         </p:txBody>
       </p:sp>
@@ -6045,7 +6603,7 @@
         <p:spPr>
           <a:xfrm>
             <a:off x="822960" y="1536192"/>
-            <a:ext cx="10515600" cy="1844039"/>
+            <a:ext cx="10515600" cy="2411729"/>
           </a:xfrm>
           <a:prstGeom prst="rect">
             <a:avLst/>
@@ -6067,7 +6625,7 @@
               </a:spcAft>
               <a:defRPr sz="1800">
                 <a:solidFill>
-                  <a:srgbClr val="4B545D"/>
+                  <a:srgbClr val="4A4448"/>
                 </a:solidFill>
                 <a:latin typeface="DejaVu Sans"/>
               </a:defRPr>
@@ -6086,7 +6644,7 @@
               </a:spcAft>
               <a:defRPr sz="1800">
                 <a:solidFill>
-                  <a:srgbClr val="4B545D"/>
+                  <a:srgbClr val="4A4448"/>
                 </a:solidFill>
                 <a:latin typeface="DejaVu Sans"/>
               </a:defRPr>
@@ -6105,7 +6663,7 @@
               </a:spcAft>
               <a:defRPr sz="1800">
                 <a:solidFill>
-                  <a:srgbClr val="4B545D"/>
+                  <a:srgbClr val="4A4448"/>
                 </a:solidFill>
                 <a:latin typeface="DejaVu Sans"/>
               </a:defRPr>
@@ -6124,7 +6682,7 @@
               </a:spcAft>
               <a:defRPr sz="1800">
                 <a:solidFill>
-                  <a:srgbClr val="4B545D"/>
+                  <a:srgbClr val="4A4448"/>
                 </a:solidFill>
                 <a:latin typeface="DejaVu Sans"/>
               </a:defRPr>
@@ -6132,6 +6690,55 @@
             <a:r>
               <a:t>•  No staffing savings, avoided breach impact or ROI has been measured.</a:t>
             </a:r>
+          </a:p>
+          <a:p>
+            <a:pPr>
+              <a:lnSpc>
+                <a:spcPct val="125000"/>
+              </a:lnSpc>
+              <a:spcAft>
+                <a:spcPts val="0"/>
+              </a:spcAft>
+              <a:defRPr sz="1500" b="1">
+                <a:solidFill>
+                  <a:srgbClr val="C8102E"/>
+                </a:solidFill>
+                <a:latin typeface="DejaVu Sans"/>
+              </a:defRPr>
+            </a:pPr>
+            <a:r>
+              <a:t>Bottom line: completeness, policy approval and real-world ROI are still open questions before this can inform staffing decisions.</a:t>
+            </a:r>
+          </a:p>
+        </p:txBody>
+      </p:sp>
+      <p:sp>
+        <p:nvSpPr>
+          <p:cNvPr id="90" name="Rectangle Accent 90"/>
+          <p:cNvSpPr/>
+          <p:nvPr/>
+        </p:nvSpPr>
+        <p:spPr>
+          <a:xfrm>
+            <a:off x="621792" y="3425951"/>
+            <a:ext cx="50292" cy="476250"/>
+          </a:xfrm>
+          <a:prstGeom prst="rect">
+            <a:avLst/>
+          </a:prstGeom>
+          <a:solidFill>
+            <a:srgbClr val="C8102E"/>
+          </a:solidFill>
+          <a:ln>
+            <a:noFill/>
+          </a:ln>
+        </p:spPr>
+        <p:txBody>
+          <a:bodyPr rtlCol="0" anchor="ctr"/>
+          <a:lstStyle/>
+          <a:p>
+            <a:pPr algn="ctr"/>
+            <a:endParaRPr/>
           </a:p>
         </p:txBody>
       </p:sp>
@@ -6160,7 +6767,7 @@
             <a:pPr>
               <a:defRPr sz="1000">
                 <a:solidFill>
-                  <a:srgbClr val="4B545D"/>
+                  <a:srgbClr val="4A4448"/>
                 </a:solidFill>
               </a:defRPr>
             </a:pPr>
@@ -6195,7 +6802,7 @@
             <a:pPr>
               <a:defRPr sz="1000" b="0">
                 <a:solidFill>
-                  <a:srgbClr val="4B545D"/>
+                  <a:srgbClr val="4A4448"/>
                 </a:solidFill>
                 <a:latin typeface="DejaVu Sans"/>
               </a:defRPr>
@@ -6215,12 +6822,12 @@
 </file>
 
 <file path=ppt/slides/slide8.xml><?xml version="1.0" encoding="utf-8"?>
-<p:sld xmlns:a="http://schemas.openxmlformats.org/drawingml/2006/main" xmlns:p="http://schemas.openxmlformats.org/presentationml/2006/main" xmlns:r="http://schemas.openxmlformats.org/officeDocument/2006/relationships">
+<p:sld xmlns:a="http://schemas.openxmlformats.org/drawingml/2006/main" xmlns:r="http://schemas.openxmlformats.org/officeDocument/2006/relationships" xmlns:p="http://schemas.openxmlformats.org/presentationml/2006/main">
   <p:cSld>
     <p:bg>
       <p:bgPr>
         <a:solidFill>
-          <a:srgbClr val="F8FAFC"/>
+          <a:srgbClr val="FDF9F9"/>
         </a:solidFill>
         <a:effectLst/>
       </p:bgPr>
@@ -6231,7 +6838,14 @@
         <p:cNvGrpSpPr/>
         <p:nvPr/>
       </p:nvGrpSpPr>
-      <p:grpSpPr/>
+      <p:grpSpPr>
+        <a:xfrm>
+          <a:off x="0" y="0"/>
+          <a:ext cx="0" cy="0"/>
+          <a:chOff x="0" y="0"/>
+          <a:chExt cx="0" cy="0"/>
+        </a:xfrm>
+      </p:grpSpPr>
       <p:sp>
         <p:nvSpPr>
           <p:cNvPr id="2" name="Rectangle 1"/>
@@ -6247,7 +6861,7 @@
             <a:avLst/>
           </a:prstGeom>
           <a:solidFill>
-            <a:srgbClr val="3470A8"/>
+            <a:srgbClr val="C8102E"/>
           </a:solidFill>
           <a:ln>
             <a:noFill/>
@@ -6272,6 +6886,7 @@
           <a:lstStyle/>
           <a:p>
             <a:pPr algn="ctr"/>
+            <a:endParaRPr/>
           </a:p>
         </p:txBody>
       </p:sp>
@@ -6303,7 +6918,7 @@
               </a:lnSpc>
               <a:defRPr sz="2800" b="1">
                 <a:solidFill>
-                  <a:srgbClr val="1F3752"/>
+                  <a:srgbClr val="5B1220"/>
                 </a:solidFill>
                 <a:latin typeface="DejaVu Sans"/>
               </a:defRPr>
@@ -6329,7 +6944,7 @@
             <a:avLst/>
           </a:prstGeom>
           <a:solidFill>
-            <a:srgbClr val="3470A8"/>
+            <a:srgbClr val="C8102E"/>
           </a:solidFill>
           <a:ln>
             <a:noFill/>
@@ -6354,6 +6969,7 @@
           <a:lstStyle/>
           <a:p>
             <a:pPr algn="ctr"/>
+            <a:endParaRPr/>
           </a:p>
         </p:txBody>
       </p:sp>
@@ -6366,7 +6982,7 @@
         <p:spPr>
           <a:xfrm>
             <a:off x="822960" y="1536192"/>
-            <a:ext cx="10515600" cy="2129790"/>
+            <a:ext cx="10515600" cy="2697480"/>
           </a:xfrm>
           <a:prstGeom prst="rect">
             <a:avLst/>
@@ -6388,7 +7004,7 @@
               </a:spcAft>
               <a:defRPr sz="1800">
                 <a:solidFill>
-                  <a:srgbClr val="4B545D"/>
+                  <a:srgbClr val="4A4448"/>
                 </a:solidFill>
                 <a:latin typeface="DejaVu Sans"/>
               </a:defRPr>
@@ -6407,7 +7023,7 @@
               </a:spcAft>
               <a:defRPr sz="1800">
                 <a:solidFill>
-                  <a:srgbClr val="4B545D"/>
+                  <a:srgbClr val="4A4448"/>
                 </a:solidFill>
                 <a:latin typeface="DejaVu Sans"/>
               </a:defRPr>
@@ -6426,7 +7042,7 @@
               </a:spcAft>
               <a:defRPr sz="1800">
                 <a:solidFill>
-                  <a:srgbClr val="4B545D"/>
+                  <a:srgbClr val="4A4448"/>
                 </a:solidFill>
                 <a:latin typeface="DejaVu Sans"/>
               </a:defRPr>
@@ -6445,7 +7061,7 @@
               </a:spcAft>
               <a:defRPr sz="1800">
                 <a:solidFill>
-                  <a:srgbClr val="4B545D"/>
+                  <a:srgbClr val="4A4448"/>
                 </a:solidFill>
                 <a:latin typeface="DejaVu Sans"/>
               </a:defRPr>
@@ -6453,6 +7069,55 @@
             <a:r>
               <a:t>•  Pilot with human review; compare service outcomes and planner effort before estimating value.</a:t>
             </a:r>
+          </a:p>
+          <a:p>
+            <a:pPr>
+              <a:lnSpc>
+                <a:spcPct val="125000"/>
+              </a:lnSpc>
+              <a:spcAft>
+                <a:spcPts val="0"/>
+              </a:spcAft>
+              <a:defRPr sz="1500" b="1">
+                <a:solidFill>
+                  <a:srgbClr val="C8102E"/>
+                </a:solidFill>
+                <a:latin typeface="DejaVu Sans"/>
+              </a:defRPr>
+            </a:pPr>
+            <a:r>
+              <a:t>Bottom line: resolve data and policy gaps first, then pilot with human review before trusting the forecast operationally.</a:t>
+            </a:r>
+          </a:p>
+        </p:txBody>
+      </p:sp>
+      <p:sp>
+        <p:nvSpPr>
+          <p:cNvPr id="90" name="Rectangle Accent 90"/>
+          <p:cNvSpPr/>
+          <p:nvPr/>
+        </p:nvSpPr>
+        <p:spPr>
+          <a:xfrm>
+            <a:off x="621792" y="3711702"/>
+            <a:ext cx="50292" cy="476250"/>
+          </a:xfrm>
+          <a:prstGeom prst="rect">
+            <a:avLst/>
+          </a:prstGeom>
+          <a:solidFill>
+            <a:srgbClr val="C8102E"/>
+          </a:solidFill>
+          <a:ln>
+            <a:noFill/>
+          </a:ln>
+        </p:spPr>
+        <p:txBody>
+          <a:bodyPr rtlCol="0" anchor="ctr"/>
+          <a:lstStyle/>
+          <a:p>
+            <a:pPr algn="ctr"/>
+            <a:endParaRPr/>
           </a:p>
         </p:txBody>
       </p:sp>
@@ -6481,7 +7146,7 @@
             <a:pPr>
               <a:defRPr sz="1000">
                 <a:solidFill>
-                  <a:srgbClr val="4B545D"/>
+                  <a:srgbClr val="4A4448"/>
                 </a:solidFill>
               </a:defRPr>
             </a:pPr>
@@ -6516,7 +7181,7 @@
             <a:pPr>
               <a:defRPr sz="1000" b="0">
                 <a:solidFill>
-                  <a:srgbClr val="4B545D"/>
+                  <a:srgbClr val="4A4448"/>
                 </a:solidFill>
                 <a:latin typeface="DejaVu Sans"/>
               </a:defRPr>
@@ -6536,12 +7201,12 @@
 </file>
 
 <file path=ppt/slides/slide9.xml><?xml version="1.0" encoding="utf-8"?>
-<p:sld xmlns:a="http://schemas.openxmlformats.org/drawingml/2006/main" xmlns:p="http://schemas.openxmlformats.org/presentationml/2006/main" xmlns:r="http://schemas.openxmlformats.org/officeDocument/2006/relationships">
+<p:sld xmlns:a="http://schemas.openxmlformats.org/drawingml/2006/main" xmlns:r="http://schemas.openxmlformats.org/officeDocument/2006/relationships" xmlns:p="http://schemas.openxmlformats.org/presentationml/2006/main">
   <p:cSld>
     <p:bg>
       <p:bgPr>
         <a:solidFill>
-          <a:srgbClr val="F8FAFC"/>
+          <a:srgbClr val="FDF9F9"/>
         </a:solidFill>
         <a:effectLst/>
       </p:bgPr>
@@ -6552,7 +7217,14 @@
         <p:cNvGrpSpPr/>
         <p:nvPr/>
       </p:nvGrpSpPr>
-      <p:grpSpPr/>
+      <p:grpSpPr>
+        <a:xfrm>
+          <a:off x="0" y="0"/>
+          <a:ext cx="0" cy="0"/>
+          <a:chOff x="0" y="0"/>
+          <a:chExt cx="0" cy="0"/>
+        </a:xfrm>
+      </p:grpSpPr>
       <p:sp>
         <p:nvSpPr>
           <p:cNvPr id="2" name="Rectangle 1"/>
@@ -6568,7 +7240,7 @@
             <a:avLst/>
           </a:prstGeom>
           <a:solidFill>
-            <a:srgbClr val="3470A8"/>
+            <a:srgbClr val="C8102E"/>
           </a:solidFill>
           <a:ln>
             <a:noFill/>
@@ -6593,6 +7265,7 @@
           <a:lstStyle/>
           <a:p>
             <a:pPr algn="ctr"/>
+            <a:endParaRPr/>
           </a:p>
         </p:txBody>
       </p:sp>
@@ -6624,7 +7297,7 @@
               </a:lnSpc>
               <a:defRPr sz="2800" b="1">
                 <a:solidFill>
-                  <a:srgbClr val="1F3752"/>
+                  <a:srgbClr val="5B1220"/>
                 </a:solidFill>
                 <a:latin typeface="DejaVu Sans"/>
               </a:defRPr>
@@ -6650,7 +7323,7 @@
             <a:avLst/>
           </a:prstGeom>
           <a:solidFill>
-            <a:srgbClr val="3470A8"/>
+            <a:srgbClr val="C8102E"/>
           </a:solidFill>
           <a:ln>
             <a:noFill/>
@@ -6675,6 +7348,7 @@
           <a:lstStyle/>
           <a:p>
             <a:pPr algn="ctr"/>
+            <a:endParaRPr/>
           </a:p>
         </p:txBody>
       </p:sp>
@@ -6687,7 +7361,7 @@
         <p:spPr>
           <a:xfrm>
             <a:off x="822960" y="1536192"/>
-            <a:ext cx="10515600" cy="3615690"/>
+            <a:ext cx="10515600" cy="4183380"/>
           </a:xfrm>
           <a:prstGeom prst="rect">
             <a:avLst/>
@@ -6709,7 +7383,7 @@
               </a:spcAft>
               <a:defRPr sz="1800">
                 <a:solidFill>
-                  <a:srgbClr val="4B545D"/>
+                  <a:srgbClr val="4A4448"/>
                 </a:solidFill>
                 <a:latin typeface="DejaVu Sans"/>
               </a:defRPr>
@@ -6728,7 +7402,7 @@
               </a:spcAft>
               <a:defRPr sz="1800">
                 <a:solidFill>
-                  <a:srgbClr val="4B545D"/>
+                  <a:srgbClr val="4A4448"/>
                 </a:solidFill>
                 <a:latin typeface="DejaVu Sans"/>
               </a:defRPr>
@@ -6747,7 +7421,7 @@
               </a:spcAft>
               <a:defRPr sz="1800">
                 <a:solidFill>
-                  <a:srgbClr val="4B545D"/>
+                  <a:srgbClr val="4A4448"/>
                 </a:solidFill>
                 <a:latin typeface="DejaVu Sans"/>
               </a:defRPr>
@@ -6766,7 +7440,7 @@
               </a:spcAft>
               <a:defRPr sz="1500">
                 <a:solidFill>
-                  <a:srgbClr val="4B545D"/>
+                  <a:srgbClr val="4A4448"/>
                 </a:solidFill>
                 <a:latin typeface="DejaVu Sans"/>
               </a:defRPr>
@@ -6785,7 +7459,7 @@
               </a:spcAft>
               <a:defRPr sz="1800">
                 <a:solidFill>
-                  <a:srgbClr val="4B545D"/>
+                  <a:srgbClr val="4A4448"/>
                 </a:solidFill>
                 <a:latin typeface="DejaVu Sans"/>
               </a:defRPr>
@@ -6793,6 +7467,55 @@
             <a:r>
               <a:t>•  None of this is a live production system yet; it is evidence the idea is technically workable and reviewable.</a:t>
             </a:r>
+          </a:p>
+          <a:p>
+            <a:pPr>
+              <a:lnSpc>
+                <a:spcPct val="125000"/>
+              </a:lnSpc>
+              <a:spcAft>
+                <a:spcPts val="0"/>
+              </a:spcAft>
+              <a:defRPr sz="1500" b="1">
+                <a:solidFill>
+                  <a:srgbClr val="C8102E"/>
+                </a:solidFill>
+                <a:latin typeface="DejaVu Sans"/>
+              </a:defRPr>
+            </a:pPr>
+            <a:r>
+              <a:t>Bottom line: the model already runs end to end as a demo, but it is not yet a production staffing tool.</a:t>
+            </a:r>
+          </a:p>
+        </p:txBody>
+      </p:sp>
+      <p:sp>
+        <p:nvSpPr>
+          <p:cNvPr id="90" name="Rectangle Accent 90"/>
+          <p:cNvSpPr/>
+          <p:nvPr/>
+        </p:nvSpPr>
+        <p:spPr>
+          <a:xfrm>
+            <a:off x="621792" y="5687568"/>
+            <a:ext cx="50292" cy="475488"/>
+          </a:xfrm>
+          <a:prstGeom prst="rect">
+            <a:avLst/>
+          </a:prstGeom>
+          <a:solidFill>
+            <a:srgbClr val="C8102E"/>
+          </a:solidFill>
+          <a:ln>
+            <a:noFill/>
+          </a:ln>
+        </p:spPr>
+        <p:txBody>
+          <a:bodyPr rtlCol="0" anchor="ctr"/>
+          <a:lstStyle/>
+          <a:p>
+            <a:pPr algn="ctr"/>
+            <a:endParaRPr/>
           </a:p>
         </p:txBody>
       </p:sp>
@@ -6821,7 +7544,7 @@
             <a:pPr>
               <a:defRPr sz="1000">
                 <a:solidFill>
-                  <a:srgbClr val="4B545D"/>
+                  <a:srgbClr val="4A4448"/>
                 </a:solidFill>
               </a:defRPr>
             </a:pPr>
@@ -6856,7 +7579,7 @@
             <a:pPr>
               <a:defRPr sz="1000" b="0">
                 <a:solidFill>
-                  <a:srgbClr val="4B545D"/>
+                  <a:srgbClr val="4A4448"/>
                 </a:solidFill>
                 <a:latin typeface="DejaVu Sans"/>
               </a:defRPr>
